--- a/pitch/BOAR-prezentaciya.pptx
+++ b/pitch/BOAR-prezentaciya.pptx
@@ -3317,7 +3317,7 @@
             <a:avLst/>
           </a:prstGeom>
           <a:solidFill>
-            <a:srgbClr val="F3EEE4"/>
+            <a:srgbClr val="0F2824"/>
           </a:solidFill>
           <a:ln>
             <a:noFill/>
@@ -3353,8 +3353,8 @@
         </p:nvSpPr>
         <p:spPr>
           <a:xfrm>
-            <a:off x="457200" y="228600"/>
-            <a:ext cx="10972800" cy="274320"/>
+            <a:off x="502920" y="256032"/>
+            <a:ext cx="10972800" cy="256032"/>
           </a:xfrm>
           <a:prstGeom prst="rect">
             <a:avLst/>
@@ -3388,8 +3388,8 @@
         </p:nvSpPr>
         <p:spPr>
           <a:xfrm>
-            <a:off x="457200" y="502920"/>
-            <a:ext cx="10972800" cy="457200"/>
+            <a:off x="502920" y="502920"/>
+            <a:ext cx="10972800" cy="411480"/>
           </a:xfrm>
           <a:prstGeom prst="rect">
             <a:avLst/>
@@ -3406,7 +3406,7 @@
             <a:r>
               <a:rPr sz="2200" b="1">
                 <a:solidFill>
-                  <a:srgbClr val="17241F"/>
+                  <a:srgbClr val="FFFCF7"/>
                 </a:solidFill>
                 <a:latin typeface="Georgia"/>
               </a:rPr>
@@ -3415,9 +3415,308 @@
           </a:p>
         </p:txBody>
       </p:sp>
+      <p:sp>
+        <p:nvSpPr>
+          <p:cNvPr id="5" name="Rounded Rectangle 4"/>
+          <p:cNvSpPr/>
+          <p:nvPr/>
+        </p:nvSpPr>
+        <p:spPr>
+          <a:xfrm>
+            <a:off x="502920" y="1051560"/>
+            <a:ext cx="11155680" cy="5074920"/>
+          </a:xfrm>
+          <a:prstGeom prst="roundRect">
+            <a:avLst>
+              <a:gd name="adj" fmla="val 4000"/>
+            </a:avLst>
+          </a:prstGeom>
+          <a:solidFill>
+            <a:srgbClr val="182E2A"/>
+          </a:solidFill>
+          <a:ln>
+            <a:solidFill>
+              <a:srgbClr val="2F4A44"/>
+            </a:solidFill>
+          </a:ln>
+        </p:spPr>
+        <p:style>
+          <a:lnRef idx="1">
+            <a:schemeClr val="accent1"/>
+          </a:lnRef>
+          <a:fillRef idx="3">
+            <a:schemeClr val="accent1"/>
+          </a:fillRef>
+          <a:effectRef idx="2">
+            <a:schemeClr val="accent1"/>
+          </a:effectRef>
+          <a:fontRef idx="minor">
+            <a:schemeClr val="lt1"/>
+          </a:fontRef>
+        </p:style>
+        <p:txBody>
+          <a:bodyPr rtlCol="0" anchor="ctr"/>
+          <a:lstStyle/>
+          <a:p>
+            <a:pPr algn="ctr"/>
+          </a:p>
+        </p:txBody>
+      </p:sp>
+      <p:sp>
+        <p:nvSpPr>
+          <p:cNvPr id="6" name="Rectangle 5"/>
+          <p:cNvSpPr/>
+          <p:nvPr/>
+        </p:nvSpPr>
+        <p:spPr>
+          <a:xfrm>
+            <a:off x="502920" y="1051560"/>
+            <a:ext cx="11155680" cy="384048"/>
+          </a:xfrm>
+          <a:prstGeom prst="rect">
+            <a:avLst/>
+          </a:prstGeom>
+          <a:solidFill>
+            <a:srgbClr val="243C37"/>
+          </a:solidFill>
+          <a:ln>
+            <a:noFill/>
+          </a:ln>
+        </p:spPr>
+        <p:style>
+          <a:lnRef idx="1">
+            <a:schemeClr val="accent1"/>
+          </a:lnRef>
+          <a:fillRef idx="3">
+            <a:schemeClr val="accent1"/>
+          </a:fillRef>
+          <a:effectRef idx="2">
+            <a:schemeClr val="accent1"/>
+          </a:effectRef>
+          <a:fontRef idx="minor">
+            <a:schemeClr val="lt1"/>
+          </a:fontRef>
+        </p:style>
+        <p:txBody>
+          <a:bodyPr rtlCol="0" anchor="ctr"/>
+          <a:lstStyle/>
+          <a:p>
+            <a:pPr algn="ctr"/>
+          </a:p>
+        </p:txBody>
+      </p:sp>
+      <p:sp>
+        <p:nvSpPr>
+          <p:cNvPr id="7" name="Oval 6"/>
+          <p:cNvSpPr/>
+          <p:nvPr/>
+        </p:nvSpPr>
+        <p:spPr>
+          <a:xfrm>
+            <a:off x="667512" y="1170432"/>
+            <a:ext cx="146304" cy="146304"/>
+          </a:xfrm>
+          <a:prstGeom prst="ellipse">
+            <a:avLst/>
+          </a:prstGeom>
+          <a:solidFill>
+            <a:srgbClr val="C76B5A"/>
+          </a:solidFill>
+          <a:ln>
+            <a:noFill/>
+          </a:ln>
+        </p:spPr>
+        <p:style>
+          <a:lnRef idx="1">
+            <a:schemeClr val="accent1"/>
+          </a:lnRef>
+          <a:fillRef idx="3">
+            <a:schemeClr val="accent1"/>
+          </a:fillRef>
+          <a:effectRef idx="2">
+            <a:schemeClr val="accent1"/>
+          </a:effectRef>
+          <a:fontRef idx="minor">
+            <a:schemeClr val="lt1"/>
+          </a:fontRef>
+        </p:style>
+        <p:txBody>
+          <a:bodyPr rtlCol="0" anchor="ctr"/>
+          <a:lstStyle/>
+          <a:p>
+            <a:pPr algn="ctr"/>
+          </a:p>
+        </p:txBody>
+      </p:sp>
+      <p:sp>
+        <p:nvSpPr>
+          <p:cNvPr id="8" name="Oval 7"/>
+          <p:cNvSpPr/>
+          <p:nvPr/>
+        </p:nvSpPr>
+        <p:spPr>
+          <a:xfrm>
+            <a:off x="923544" y="1170432"/>
+            <a:ext cx="146304" cy="146304"/>
+          </a:xfrm>
+          <a:prstGeom prst="ellipse">
+            <a:avLst/>
+          </a:prstGeom>
+          <a:solidFill>
+            <a:srgbClr val="C9A05C"/>
+          </a:solidFill>
+          <a:ln>
+            <a:noFill/>
+          </a:ln>
+        </p:spPr>
+        <p:style>
+          <a:lnRef idx="1">
+            <a:schemeClr val="accent1"/>
+          </a:lnRef>
+          <a:fillRef idx="3">
+            <a:schemeClr val="accent1"/>
+          </a:fillRef>
+          <a:effectRef idx="2">
+            <a:schemeClr val="accent1"/>
+          </a:effectRef>
+          <a:fontRef idx="minor">
+            <a:schemeClr val="lt1"/>
+          </a:fontRef>
+        </p:style>
+        <p:txBody>
+          <a:bodyPr rtlCol="0" anchor="ctr"/>
+          <a:lstStyle/>
+          <a:p>
+            <a:pPr algn="ctr"/>
+          </a:p>
+        </p:txBody>
+      </p:sp>
+      <p:sp>
+        <p:nvSpPr>
+          <p:cNvPr id="9" name="Oval 8"/>
+          <p:cNvSpPr/>
+          <p:nvPr/>
+        </p:nvSpPr>
+        <p:spPr>
+          <a:xfrm>
+            <a:off x="1179576" y="1170432"/>
+            <a:ext cx="146304" cy="146304"/>
+          </a:xfrm>
+          <a:prstGeom prst="ellipse">
+            <a:avLst/>
+          </a:prstGeom>
+          <a:solidFill>
+            <a:srgbClr val="5E9A72"/>
+          </a:solidFill>
+          <a:ln>
+            <a:noFill/>
+          </a:ln>
+        </p:spPr>
+        <p:style>
+          <a:lnRef idx="1">
+            <a:schemeClr val="accent1"/>
+          </a:lnRef>
+          <a:fillRef idx="3">
+            <a:schemeClr val="accent1"/>
+          </a:fillRef>
+          <a:effectRef idx="2">
+            <a:schemeClr val="accent1"/>
+          </a:effectRef>
+          <a:fontRef idx="minor">
+            <a:schemeClr val="lt1"/>
+          </a:fontRef>
+        </p:style>
+        <p:txBody>
+          <a:bodyPr rtlCol="0" anchor="ctr"/>
+          <a:lstStyle/>
+          <a:p>
+            <a:pPr algn="ctr"/>
+          </a:p>
+        </p:txBody>
+      </p:sp>
+      <p:sp>
+        <p:nvSpPr>
+          <p:cNvPr id="10" name="Rounded Rectangle 9"/>
+          <p:cNvSpPr/>
+          <p:nvPr/>
+        </p:nvSpPr>
+        <p:spPr>
+          <a:xfrm>
+            <a:off x="1691640" y="1124712"/>
+            <a:ext cx="9692640" cy="237744"/>
+          </a:xfrm>
+          <a:prstGeom prst="roundRect">
+            <a:avLst>
+              <a:gd name="adj" fmla="val 50000"/>
+            </a:avLst>
+          </a:prstGeom>
+          <a:solidFill>
+            <a:srgbClr val="12221F"/>
+          </a:solidFill>
+          <a:ln>
+            <a:noFill/>
+          </a:ln>
+        </p:spPr>
+        <p:style>
+          <a:lnRef idx="1">
+            <a:schemeClr val="accent1"/>
+          </a:lnRef>
+          <a:fillRef idx="3">
+            <a:schemeClr val="accent1"/>
+          </a:fillRef>
+          <a:effectRef idx="2">
+            <a:schemeClr val="accent1"/>
+          </a:effectRef>
+          <a:fontRef idx="minor">
+            <a:schemeClr val="lt1"/>
+          </a:fontRef>
+        </p:style>
+        <p:txBody>
+          <a:bodyPr rtlCol="0" anchor="ctr"/>
+          <a:lstStyle/>
+          <a:p>
+            <a:pPr algn="ctr"/>
+          </a:p>
+        </p:txBody>
+      </p:sp>
+      <p:sp>
+        <p:nvSpPr>
+          <p:cNvPr id="11" name="TextBox 10"/>
+          <p:cNvSpPr txBox="1"/>
+          <p:nvPr/>
+        </p:nvSpPr>
+        <p:spPr>
+          <a:xfrm>
+            <a:off x="1828800" y="1124712"/>
+            <a:ext cx="9509760" cy="237744"/>
+          </a:xfrm>
+          <a:prstGeom prst="rect">
+            <a:avLst/>
+          </a:prstGeom>
+          <a:noFill/>
+        </p:spPr>
+        <p:txBody>
+          <a:bodyPr wrap="square">
+            <a:spAutoFit/>
+          </a:bodyPr>
+          <a:lstStyle/>
+          <a:p>
+            <a:pPr algn="l"/>
+            <a:r>
+              <a:rPr sz="1000" b="0">
+                <a:solidFill>
+                  <a:srgbClr val="A8B9B3"/>
+                </a:solidFill>
+                <a:latin typeface="Calibri"/>
+              </a:rPr>
+              <a:t>leshahker.github.io/bsaer-mockup/cabinet/</a:t>
+            </a:r>
+          </a:p>
+        </p:txBody>
+      </p:sp>
       <p:pic>
         <p:nvPicPr>
-          <p:cNvPr id="5" name="Picture 4" descr="06-cabinet.png"/>
+          <p:cNvPr id="12" name="Picture 11" descr="06-cabinet.png"/>
           <p:cNvPicPr>
             <a:picLocks noChangeAspect="1"/>
           </p:cNvPicPr>
@@ -3431,8 +3730,8 @@
         </p:blipFill>
         <p:spPr>
           <a:xfrm>
-            <a:off x="731520" y="1097280"/>
-            <a:ext cx="8046720" cy="5029200"/>
+            <a:off x="2503627" y="1545336"/>
+            <a:ext cx="7154265" cy="4471416"/>
           </a:xfrm>
           <a:prstGeom prst="rect">
             <a:avLst/>
@@ -3441,7 +3740,50 @@
       </p:pic>
       <p:sp>
         <p:nvSpPr>
-          <p:cNvPr id="6" name="TextBox 5"/>
+          <p:cNvPr id="13" name="Rectangle 12"/>
+          <p:cNvSpPr/>
+          <p:nvPr/>
+        </p:nvSpPr>
+        <p:spPr>
+          <a:xfrm>
+            <a:off x="2503627" y="1545336"/>
+            <a:ext cx="7154265" cy="4471416"/>
+          </a:xfrm>
+          <a:prstGeom prst="rect">
+            <a:avLst/>
+          </a:prstGeom>
+          <a:noFill/>
+          <a:ln w="15875">
+            <a:solidFill>
+              <a:srgbClr val="3A554E"/>
+            </a:solidFill>
+          </a:ln>
+        </p:spPr>
+        <p:style>
+          <a:lnRef idx="1">
+            <a:schemeClr val="accent1"/>
+          </a:lnRef>
+          <a:fillRef idx="3">
+            <a:schemeClr val="accent1"/>
+          </a:fillRef>
+          <a:effectRef idx="2">
+            <a:schemeClr val="accent1"/>
+          </a:effectRef>
+          <a:fontRef idx="minor">
+            <a:schemeClr val="lt1"/>
+          </a:fontRef>
+        </p:style>
+        <p:txBody>
+          <a:bodyPr rtlCol="0" anchor="ctr"/>
+          <a:lstStyle/>
+          <a:p>
+            <a:pPr algn="ctr"/>
+          </a:p>
+        </p:txBody>
+      </p:sp>
+      <p:sp>
+        <p:nvSpPr>
+          <p:cNvPr id="14" name="TextBox 13"/>
           <p:cNvSpPr txBox="1"/>
           <p:nvPr/>
         </p:nvSpPr>
@@ -3465,7 +3807,7 @@
             <a:r>
               <a:rPr sz="1100" b="0">
                 <a:solidFill>
-                  <a:srgbClr val="66756E"/>
+                  <a:srgbClr val="8AA199"/>
                 </a:solidFill>
                 <a:latin typeface="Calibri"/>
               </a:rPr>
@@ -3476,7 +3818,7 @@
       </p:sp>
       <p:sp>
         <p:nvSpPr>
-          <p:cNvPr id="7" name="TextBox 6"/>
+          <p:cNvPr id="15" name="TextBox 14"/>
           <p:cNvSpPr txBox="1"/>
           <p:nvPr/>
         </p:nvSpPr>
@@ -3500,7 +3842,7 @@
             <a:r>
               <a:rPr sz="1100" b="0">
                 <a:solidFill>
-                  <a:srgbClr val="66756E"/>
+                  <a:srgbClr val="8AA199"/>
                 </a:solidFill>
                 <a:latin typeface="Calibri"/>
               </a:rPr>
@@ -5028,7 +5370,7 @@
             <a:avLst/>
           </a:prstGeom>
           <a:solidFill>
-            <a:srgbClr val="F3EEE4"/>
+            <a:srgbClr val="0F2824"/>
           </a:solidFill>
           <a:ln>
             <a:noFill/>
@@ -5064,8 +5406,8 @@
         </p:nvSpPr>
         <p:spPr>
           <a:xfrm>
-            <a:off x="457200" y="228600"/>
-            <a:ext cx="10972800" cy="274320"/>
+            <a:off x="502920" y="256032"/>
+            <a:ext cx="10972800" cy="256032"/>
           </a:xfrm>
           <a:prstGeom prst="rect">
             <a:avLst/>
@@ -5099,8 +5441,8 @@
         </p:nvSpPr>
         <p:spPr>
           <a:xfrm>
-            <a:off x="457200" y="502920"/>
-            <a:ext cx="10972800" cy="457200"/>
+            <a:off x="502920" y="502920"/>
+            <a:ext cx="10972800" cy="411480"/>
           </a:xfrm>
           <a:prstGeom prst="rect">
             <a:avLst/>
@@ -5115,9 +5457,9 @@
           <a:p>
             <a:pPr algn="l"/>
             <a:r>
-              <a:rPr sz="2400" b="1">
-                <a:solidFill>
-                  <a:srgbClr val="17241F"/>
+              <a:rPr sz="2200" b="1">
+                <a:solidFill>
+                  <a:srgbClr val="FFFCF7"/>
                 </a:solidFill>
                 <a:latin typeface="Georgia"/>
               </a:rPr>
@@ -5126,9 +5468,308 @@
           </a:p>
         </p:txBody>
       </p:sp>
+      <p:sp>
+        <p:nvSpPr>
+          <p:cNvPr id="5" name="Rounded Rectangle 4"/>
+          <p:cNvSpPr/>
+          <p:nvPr/>
+        </p:nvSpPr>
+        <p:spPr>
+          <a:xfrm>
+            <a:off x="502920" y="1051560"/>
+            <a:ext cx="11155680" cy="5074920"/>
+          </a:xfrm>
+          <a:prstGeom prst="roundRect">
+            <a:avLst>
+              <a:gd name="adj" fmla="val 4000"/>
+            </a:avLst>
+          </a:prstGeom>
+          <a:solidFill>
+            <a:srgbClr val="182E2A"/>
+          </a:solidFill>
+          <a:ln>
+            <a:solidFill>
+              <a:srgbClr val="2F4A44"/>
+            </a:solidFill>
+          </a:ln>
+        </p:spPr>
+        <p:style>
+          <a:lnRef idx="1">
+            <a:schemeClr val="accent1"/>
+          </a:lnRef>
+          <a:fillRef idx="3">
+            <a:schemeClr val="accent1"/>
+          </a:fillRef>
+          <a:effectRef idx="2">
+            <a:schemeClr val="accent1"/>
+          </a:effectRef>
+          <a:fontRef idx="minor">
+            <a:schemeClr val="lt1"/>
+          </a:fontRef>
+        </p:style>
+        <p:txBody>
+          <a:bodyPr rtlCol="0" anchor="ctr"/>
+          <a:lstStyle/>
+          <a:p>
+            <a:pPr algn="ctr"/>
+          </a:p>
+        </p:txBody>
+      </p:sp>
+      <p:sp>
+        <p:nvSpPr>
+          <p:cNvPr id="6" name="Rectangle 5"/>
+          <p:cNvSpPr/>
+          <p:nvPr/>
+        </p:nvSpPr>
+        <p:spPr>
+          <a:xfrm>
+            <a:off x="502920" y="1051560"/>
+            <a:ext cx="11155680" cy="384048"/>
+          </a:xfrm>
+          <a:prstGeom prst="rect">
+            <a:avLst/>
+          </a:prstGeom>
+          <a:solidFill>
+            <a:srgbClr val="243C37"/>
+          </a:solidFill>
+          <a:ln>
+            <a:noFill/>
+          </a:ln>
+        </p:spPr>
+        <p:style>
+          <a:lnRef idx="1">
+            <a:schemeClr val="accent1"/>
+          </a:lnRef>
+          <a:fillRef idx="3">
+            <a:schemeClr val="accent1"/>
+          </a:fillRef>
+          <a:effectRef idx="2">
+            <a:schemeClr val="accent1"/>
+          </a:effectRef>
+          <a:fontRef idx="minor">
+            <a:schemeClr val="lt1"/>
+          </a:fontRef>
+        </p:style>
+        <p:txBody>
+          <a:bodyPr rtlCol="0" anchor="ctr"/>
+          <a:lstStyle/>
+          <a:p>
+            <a:pPr algn="ctr"/>
+          </a:p>
+        </p:txBody>
+      </p:sp>
+      <p:sp>
+        <p:nvSpPr>
+          <p:cNvPr id="7" name="Oval 6"/>
+          <p:cNvSpPr/>
+          <p:nvPr/>
+        </p:nvSpPr>
+        <p:spPr>
+          <a:xfrm>
+            <a:off x="667512" y="1170432"/>
+            <a:ext cx="146304" cy="146304"/>
+          </a:xfrm>
+          <a:prstGeom prst="ellipse">
+            <a:avLst/>
+          </a:prstGeom>
+          <a:solidFill>
+            <a:srgbClr val="C76B5A"/>
+          </a:solidFill>
+          <a:ln>
+            <a:noFill/>
+          </a:ln>
+        </p:spPr>
+        <p:style>
+          <a:lnRef idx="1">
+            <a:schemeClr val="accent1"/>
+          </a:lnRef>
+          <a:fillRef idx="3">
+            <a:schemeClr val="accent1"/>
+          </a:fillRef>
+          <a:effectRef idx="2">
+            <a:schemeClr val="accent1"/>
+          </a:effectRef>
+          <a:fontRef idx="minor">
+            <a:schemeClr val="lt1"/>
+          </a:fontRef>
+        </p:style>
+        <p:txBody>
+          <a:bodyPr rtlCol="0" anchor="ctr"/>
+          <a:lstStyle/>
+          <a:p>
+            <a:pPr algn="ctr"/>
+          </a:p>
+        </p:txBody>
+      </p:sp>
+      <p:sp>
+        <p:nvSpPr>
+          <p:cNvPr id="8" name="Oval 7"/>
+          <p:cNvSpPr/>
+          <p:nvPr/>
+        </p:nvSpPr>
+        <p:spPr>
+          <a:xfrm>
+            <a:off x="923544" y="1170432"/>
+            <a:ext cx="146304" cy="146304"/>
+          </a:xfrm>
+          <a:prstGeom prst="ellipse">
+            <a:avLst/>
+          </a:prstGeom>
+          <a:solidFill>
+            <a:srgbClr val="C9A05C"/>
+          </a:solidFill>
+          <a:ln>
+            <a:noFill/>
+          </a:ln>
+        </p:spPr>
+        <p:style>
+          <a:lnRef idx="1">
+            <a:schemeClr val="accent1"/>
+          </a:lnRef>
+          <a:fillRef idx="3">
+            <a:schemeClr val="accent1"/>
+          </a:fillRef>
+          <a:effectRef idx="2">
+            <a:schemeClr val="accent1"/>
+          </a:effectRef>
+          <a:fontRef idx="minor">
+            <a:schemeClr val="lt1"/>
+          </a:fontRef>
+        </p:style>
+        <p:txBody>
+          <a:bodyPr rtlCol="0" anchor="ctr"/>
+          <a:lstStyle/>
+          <a:p>
+            <a:pPr algn="ctr"/>
+          </a:p>
+        </p:txBody>
+      </p:sp>
+      <p:sp>
+        <p:nvSpPr>
+          <p:cNvPr id="9" name="Oval 8"/>
+          <p:cNvSpPr/>
+          <p:nvPr/>
+        </p:nvSpPr>
+        <p:spPr>
+          <a:xfrm>
+            <a:off x="1179576" y="1170432"/>
+            <a:ext cx="146304" cy="146304"/>
+          </a:xfrm>
+          <a:prstGeom prst="ellipse">
+            <a:avLst/>
+          </a:prstGeom>
+          <a:solidFill>
+            <a:srgbClr val="5E9A72"/>
+          </a:solidFill>
+          <a:ln>
+            <a:noFill/>
+          </a:ln>
+        </p:spPr>
+        <p:style>
+          <a:lnRef idx="1">
+            <a:schemeClr val="accent1"/>
+          </a:lnRef>
+          <a:fillRef idx="3">
+            <a:schemeClr val="accent1"/>
+          </a:fillRef>
+          <a:effectRef idx="2">
+            <a:schemeClr val="accent1"/>
+          </a:effectRef>
+          <a:fontRef idx="minor">
+            <a:schemeClr val="lt1"/>
+          </a:fontRef>
+        </p:style>
+        <p:txBody>
+          <a:bodyPr rtlCol="0" anchor="ctr"/>
+          <a:lstStyle/>
+          <a:p>
+            <a:pPr algn="ctr"/>
+          </a:p>
+        </p:txBody>
+      </p:sp>
+      <p:sp>
+        <p:nvSpPr>
+          <p:cNvPr id="10" name="Rounded Rectangle 9"/>
+          <p:cNvSpPr/>
+          <p:nvPr/>
+        </p:nvSpPr>
+        <p:spPr>
+          <a:xfrm>
+            <a:off x="1691640" y="1124712"/>
+            <a:ext cx="9692640" cy="237744"/>
+          </a:xfrm>
+          <a:prstGeom prst="roundRect">
+            <a:avLst>
+              <a:gd name="adj" fmla="val 50000"/>
+            </a:avLst>
+          </a:prstGeom>
+          <a:solidFill>
+            <a:srgbClr val="12221F"/>
+          </a:solidFill>
+          <a:ln>
+            <a:noFill/>
+          </a:ln>
+        </p:spPr>
+        <p:style>
+          <a:lnRef idx="1">
+            <a:schemeClr val="accent1"/>
+          </a:lnRef>
+          <a:fillRef idx="3">
+            <a:schemeClr val="accent1"/>
+          </a:fillRef>
+          <a:effectRef idx="2">
+            <a:schemeClr val="accent1"/>
+          </a:effectRef>
+          <a:fontRef idx="minor">
+            <a:schemeClr val="lt1"/>
+          </a:fontRef>
+        </p:style>
+        <p:txBody>
+          <a:bodyPr rtlCol="0" anchor="ctr"/>
+          <a:lstStyle/>
+          <a:p>
+            <a:pPr algn="ctr"/>
+          </a:p>
+        </p:txBody>
+      </p:sp>
+      <p:sp>
+        <p:nvSpPr>
+          <p:cNvPr id="11" name="TextBox 10"/>
+          <p:cNvSpPr txBox="1"/>
+          <p:nvPr/>
+        </p:nvSpPr>
+        <p:spPr>
+          <a:xfrm>
+            <a:off x="1828800" y="1124712"/>
+            <a:ext cx="9509760" cy="237744"/>
+          </a:xfrm>
+          <a:prstGeom prst="rect">
+            <a:avLst/>
+          </a:prstGeom>
+          <a:noFill/>
+        </p:spPr>
+        <p:txBody>
+          <a:bodyPr wrap="square">
+            <a:spAutoFit/>
+          </a:bodyPr>
+          <a:lstStyle/>
+          <a:p>
+            <a:pPr algn="l"/>
+            <a:r>
+              <a:rPr sz="1000" b="0">
+                <a:solidFill>
+                  <a:srgbClr val="A8B9B3"/>
+                </a:solidFill>
+                <a:latin typeface="Calibri"/>
+              </a:rPr>
+              <a:t>leshahker.github.io/bsaer-mockup/</a:t>
+            </a:r>
+          </a:p>
+        </p:txBody>
+      </p:sp>
       <p:pic>
         <p:nvPicPr>
-          <p:cNvPr id="5" name="Picture 4" descr="01-home.png"/>
+          <p:cNvPr id="12" name="Picture 11" descr="01-home.png"/>
           <p:cNvPicPr>
             <a:picLocks noChangeAspect="1"/>
           </p:cNvPicPr>
@@ -5142,8 +5783,8 @@
         </p:blipFill>
         <p:spPr>
           <a:xfrm>
-            <a:off x="731520" y="1097280"/>
-            <a:ext cx="8046720" cy="5029200"/>
+            <a:off x="2503627" y="1545336"/>
+            <a:ext cx="7154265" cy="4471416"/>
           </a:xfrm>
           <a:prstGeom prst="rect">
             <a:avLst/>
@@ -5152,7 +5793,50 @@
       </p:pic>
       <p:sp>
         <p:nvSpPr>
-          <p:cNvPr id="6" name="TextBox 5"/>
+          <p:cNvPr id="13" name="Rectangle 12"/>
+          <p:cNvSpPr/>
+          <p:nvPr/>
+        </p:nvSpPr>
+        <p:spPr>
+          <a:xfrm>
+            <a:off x="2503627" y="1545336"/>
+            <a:ext cx="7154265" cy="4471416"/>
+          </a:xfrm>
+          <a:prstGeom prst="rect">
+            <a:avLst/>
+          </a:prstGeom>
+          <a:noFill/>
+          <a:ln w="15875">
+            <a:solidFill>
+              <a:srgbClr val="3A554E"/>
+            </a:solidFill>
+          </a:ln>
+        </p:spPr>
+        <p:style>
+          <a:lnRef idx="1">
+            <a:schemeClr val="accent1"/>
+          </a:lnRef>
+          <a:fillRef idx="3">
+            <a:schemeClr val="accent1"/>
+          </a:fillRef>
+          <a:effectRef idx="2">
+            <a:schemeClr val="accent1"/>
+          </a:effectRef>
+          <a:fontRef idx="minor">
+            <a:schemeClr val="lt1"/>
+          </a:fontRef>
+        </p:style>
+        <p:txBody>
+          <a:bodyPr rtlCol="0" anchor="ctr"/>
+          <a:lstStyle/>
+          <a:p>
+            <a:pPr algn="ctr"/>
+          </a:p>
+        </p:txBody>
+      </p:sp>
+      <p:sp>
+        <p:nvSpPr>
+          <p:cNvPr id="14" name="TextBox 13"/>
           <p:cNvSpPr txBox="1"/>
           <p:nvPr/>
         </p:nvSpPr>
@@ -5176,7 +5860,7 @@
             <a:r>
               <a:rPr sz="1100" b="0">
                 <a:solidFill>
-                  <a:srgbClr val="66756E"/>
+                  <a:srgbClr val="8AA199"/>
                 </a:solidFill>
                 <a:latin typeface="Calibri"/>
               </a:rPr>
@@ -5187,7 +5871,7 @@
       </p:sp>
       <p:sp>
         <p:nvSpPr>
-          <p:cNvPr id="7" name="TextBox 6"/>
+          <p:cNvPr id="15" name="TextBox 14"/>
           <p:cNvSpPr txBox="1"/>
           <p:nvPr/>
         </p:nvSpPr>
@@ -5211,7 +5895,7 @@
             <a:r>
               <a:rPr sz="1100" b="0">
                 <a:solidFill>
-                  <a:srgbClr val="66756E"/>
+                  <a:srgbClr val="8AA199"/>
                 </a:solidFill>
                 <a:latin typeface="Calibri"/>
               </a:rPr>
@@ -5694,7 +6378,7 @@
             <a:avLst/>
           </a:prstGeom>
           <a:solidFill>
-            <a:srgbClr val="F3EEE4"/>
+            <a:srgbClr val="0F2824"/>
           </a:solidFill>
           <a:ln>
             <a:noFill/>
@@ -5730,8 +6414,8 @@
         </p:nvSpPr>
         <p:spPr>
           <a:xfrm>
-            <a:off x="457200" y="228600"/>
-            <a:ext cx="10972800" cy="274320"/>
+            <a:off x="502920" y="256032"/>
+            <a:ext cx="10972800" cy="256032"/>
           </a:xfrm>
           <a:prstGeom prst="rect">
             <a:avLst/>
@@ -5765,8 +6449,8 @@
         </p:nvSpPr>
         <p:spPr>
           <a:xfrm>
-            <a:off x="457200" y="502920"/>
-            <a:ext cx="10972800" cy="457200"/>
+            <a:off x="502920" y="502920"/>
+            <a:ext cx="10972800" cy="411480"/>
           </a:xfrm>
           <a:prstGeom prst="rect">
             <a:avLst/>
@@ -5783,7 +6467,7 @@
             <a:r>
               <a:rPr sz="2200" b="1">
                 <a:solidFill>
-                  <a:srgbClr val="17241F"/>
+                  <a:srgbClr val="FFFCF7"/>
                 </a:solidFill>
                 <a:latin typeface="Georgia"/>
               </a:rPr>
@@ -5792,9 +6476,308 @@
           </a:p>
         </p:txBody>
       </p:sp>
+      <p:sp>
+        <p:nvSpPr>
+          <p:cNvPr id="5" name="Rounded Rectangle 4"/>
+          <p:cNvSpPr/>
+          <p:nvPr/>
+        </p:nvSpPr>
+        <p:spPr>
+          <a:xfrm>
+            <a:off x="502920" y="1051560"/>
+            <a:ext cx="11155680" cy="5074920"/>
+          </a:xfrm>
+          <a:prstGeom prst="roundRect">
+            <a:avLst>
+              <a:gd name="adj" fmla="val 4000"/>
+            </a:avLst>
+          </a:prstGeom>
+          <a:solidFill>
+            <a:srgbClr val="182E2A"/>
+          </a:solidFill>
+          <a:ln>
+            <a:solidFill>
+              <a:srgbClr val="2F4A44"/>
+            </a:solidFill>
+          </a:ln>
+        </p:spPr>
+        <p:style>
+          <a:lnRef idx="1">
+            <a:schemeClr val="accent1"/>
+          </a:lnRef>
+          <a:fillRef idx="3">
+            <a:schemeClr val="accent1"/>
+          </a:fillRef>
+          <a:effectRef idx="2">
+            <a:schemeClr val="accent1"/>
+          </a:effectRef>
+          <a:fontRef idx="minor">
+            <a:schemeClr val="lt1"/>
+          </a:fontRef>
+        </p:style>
+        <p:txBody>
+          <a:bodyPr rtlCol="0" anchor="ctr"/>
+          <a:lstStyle/>
+          <a:p>
+            <a:pPr algn="ctr"/>
+          </a:p>
+        </p:txBody>
+      </p:sp>
+      <p:sp>
+        <p:nvSpPr>
+          <p:cNvPr id="6" name="Rectangle 5"/>
+          <p:cNvSpPr/>
+          <p:nvPr/>
+        </p:nvSpPr>
+        <p:spPr>
+          <a:xfrm>
+            <a:off x="502920" y="1051560"/>
+            <a:ext cx="11155680" cy="384048"/>
+          </a:xfrm>
+          <a:prstGeom prst="rect">
+            <a:avLst/>
+          </a:prstGeom>
+          <a:solidFill>
+            <a:srgbClr val="243C37"/>
+          </a:solidFill>
+          <a:ln>
+            <a:noFill/>
+          </a:ln>
+        </p:spPr>
+        <p:style>
+          <a:lnRef idx="1">
+            <a:schemeClr val="accent1"/>
+          </a:lnRef>
+          <a:fillRef idx="3">
+            <a:schemeClr val="accent1"/>
+          </a:fillRef>
+          <a:effectRef idx="2">
+            <a:schemeClr val="accent1"/>
+          </a:effectRef>
+          <a:fontRef idx="minor">
+            <a:schemeClr val="lt1"/>
+          </a:fontRef>
+        </p:style>
+        <p:txBody>
+          <a:bodyPr rtlCol="0" anchor="ctr"/>
+          <a:lstStyle/>
+          <a:p>
+            <a:pPr algn="ctr"/>
+          </a:p>
+        </p:txBody>
+      </p:sp>
+      <p:sp>
+        <p:nvSpPr>
+          <p:cNvPr id="7" name="Oval 6"/>
+          <p:cNvSpPr/>
+          <p:nvPr/>
+        </p:nvSpPr>
+        <p:spPr>
+          <a:xfrm>
+            <a:off x="667512" y="1170432"/>
+            <a:ext cx="146304" cy="146304"/>
+          </a:xfrm>
+          <a:prstGeom prst="ellipse">
+            <a:avLst/>
+          </a:prstGeom>
+          <a:solidFill>
+            <a:srgbClr val="C76B5A"/>
+          </a:solidFill>
+          <a:ln>
+            <a:noFill/>
+          </a:ln>
+        </p:spPr>
+        <p:style>
+          <a:lnRef idx="1">
+            <a:schemeClr val="accent1"/>
+          </a:lnRef>
+          <a:fillRef idx="3">
+            <a:schemeClr val="accent1"/>
+          </a:fillRef>
+          <a:effectRef idx="2">
+            <a:schemeClr val="accent1"/>
+          </a:effectRef>
+          <a:fontRef idx="minor">
+            <a:schemeClr val="lt1"/>
+          </a:fontRef>
+        </p:style>
+        <p:txBody>
+          <a:bodyPr rtlCol="0" anchor="ctr"/>
+          <a:lstStyle/>
+          <a:p>
+            <a:pPr algn="ctr"/>
+          </a:p>
+        </p:txBody>
+      </p:sp>
+      <p:sp>
+        <p:nvSpPr>
+          <p:cNvPr id="8" name="Oval 7"/>
+          <p:cNvSpPr/>
+          <p:nvPr/>
+        </p:nvSpPr>
+        <p:spPr>
+          <a:xfrm>
+            <a:off x="923544" y="1170432"/>
+            <a:ext cx="146304" cy="146304"/>
+          </a:xfrm>
+          <a:prstGeom prst="ellipse">
+            <a:avLst/>
+          </a:prstGeom>
+          <a:solidFill>
+            <a:srgbClr val="C9A05C"/>
+          </a:solidFill>
+          <a:ln>
+            <a:noFill/>
+          </a:ln>
+        </p:spPr>
+        <p:style>
+          <a:lnRef idx="1">
+            <a:schemeClr val="accent1"/>
+          </a:lnRef>
+          <a:fillRef idx="3">
+            <a:schemeClr val="accent1"/>
+          </a:fillRef>
+          <a:effectRef idx="2">
+            <a:schemeClr val="accent1"/>
+          </a:effectRef>
+          <a:fontRef idx="minor">
+            <a:schemeClr val="lt1"/>
+          </a:fontRef>
+        </p:style>
+        <p:txBody>
+          <a:bodyPr rtlCol="0" anchor="ctr"/>
+          <a:lstStyle/>
+          <a:p>
+            <a:pPr algn="ctr"/>
+          </a:p>
+        </p:txBody>
+      </p:sp>
+      <p:sp>
+        <p:nvSpPr>
+          <p:cNvPr id="9" name="Oval 8"/>
+          <p:cNvSpPr/>
+          <p:nvPr/>
+        </p:nvSpPr>
+        <p:spPr>
+          <a:xfrm>
+            <a:off x="1179576" y="1170432"/>
+            <a:ext cx="146304" cy="146304"/>
+          </a:xfrm>
+          <a:prstGeom prst="ellipse">
+            <a:avLst/>
+          </a:prstGeom>
+          <a:solidFill>
+            <a:srgbClr val="5E9A72"/>
+          </a:solidFill>
+          <a:ln>
+            <a:noFill/>
+          </a:ln>
+        </p:spPr>
+        <p:style>
+          <a:lnRef idx="1">
+            <a:schemeClr val="accent1"/>
+          </a:lnRef>
+          <a:fillRef idx="3">
+            <a:schemeClr val="accent1"/>
+          </a:fillRef>
+          <a:effectRef idx="2">
+            <a:schemeClr val="accent1"/>
+          </a:effectRef>
+          <a:fontRef idx="minor">
+            <a:schemeClr val="lt1"/>
+          </a:fontRef>
+        </p:style>
+        <p:txBody>
+          <a:bodyPr rtlCol="0" anchor="ctr"/>
+          <a:lstStyle/>
+          <a:p>
+            <a:pPr algn="ctr"/>
+          </a:p>
+        </p:txBody>
+      </p:sp>
+      <p:sp>
+        <p:nvSpPr>
+          <p:cNvPr id="10" name="Rounded Rectangle 9"/>
+          <p:cNvSpPr/>
+          <p:nvPr/>
+        </p:nvSpPr>
+        <p:spPr>
+          <a:xfrm>
+            <a:off x="1691640" y="1124712"/>
+            <a:ext cx="9692640" cy="237744"/>
+          </a:xfrm>
+          <a:prstGeom prst="roundRect">
+            <a:avLst>
+              <a:gd name="adj" fmla="val 50000"/>
+            </a:avLst>
+          </a:prstGeom>
+          <a:solidFill>
+            <a:srgbClr val="12221F"/>
+          </a:solidFill>
+          <a:ln>
+            <a:noFill/>
+          </a:ln>
+        </p:spPr>
+        <p:style>
+          <a:lnRef idx="1">
+            <a:schemeClr val="accent1"/>
+          </a:lnRef>
+          <a:fillRef idx="3">
+            <a:schemeClr val="accent1"/>
+          </a:fillRef>
+          <a:effectRef idx="2">
+            <a:schemeClr val="accent1"/>
+          </a:effectRef>
+          <a:fontRef idx="minor">
+            <a:schemeClr val="lt1"/>
+          </a:fontRef>
+        </p:style>
+        <p:txBody>
+          <a:bodyPr rtlCol="0" anchor="ctr"/>
+          <a:lstStyle/>
+          <a:p>
+            <a:pPr algn="ctr"/>
+          </a:p>
+        </p:txBody>
+      </p:sp>
+      <p:sp>
+        <p:nvSpPr>
+          <p:cNvPr id="11" name="TextBox 10"/>
+          <p:cNvSpPr txBox="1"/>
+          <p:nvPr/>
+        </p:nvSpPr>
+        <p:spPr>
+          <a:xfrm>
+            <a:off x="1828800" y="1124712"/>
+            <a:ext cx="9509760" cy="237744"/>
+          </a:xfrm>
+          <a:prstGeom prst="rect">
+            <a:avLst/>
+          </a:prstGeom>
+          <a:noFill/>
+        </p:spPr>
+        <p:txBody>
+          <a:bodyPr wrap="square">
+            <a:spAutoFit/>
+          </a:bodyPr>
+          <a:lstStyle/>
+          <a:p>
+            <a:pPr algn="l"/>
+            <a:r>
+              <a:rPr sz="1000" b="0">
+                <a:solidFill>
+                  <a:srgbClr val="A8B9B3"/>
+                </a:solidFill>
+                <a:latin typeface="Calibri"/>
+              </a:rPr>
+              <a:t>leshahker.github.io/bsaer-mockup/library.html</a:t>
+            </a:r>
+          </a:p>
+        </p:txBody>
+      </p:sp>
       <p:pic>
         <p:nvPicPr>
-          <p:cNvPr id="5" name="Picture 4" descr="02-library.png"/>
+          <p:cNvPr id="12" name="Picture 11" descr="02-library.png"/>
           <p:cNvPicPr>
             <a:picLocks noChangeAspect="1"/>
           </p:cNvPicPr>
@@ -5808,8 +6791,8 @@
         </p:blipFill>
         <p:spPr>
           <a:xfrm>
-            <a:off x="731520" y="1097280"/>
-            <a:ext cx="8046720" cy="5029200"/>
+            <a:off x="2503627" y="1545336"/>
+            <a:ext cx="7154265" cy="4471416"/>
           </a:xfrm>
           <a:prstGeom prst="rect">
             <a:avLst/>
@@ -5818,7 +6801,50 @@
       </p:pic>
       <p:sp>
         <p:nvSpPr>
-          <p:cNvPr id="6" name="TextBox 5"/>
+          <p:cNvPr id="13" name="Rectangle 12"/>
+          <p:cNvSpPr/>
+          <p:nvPr/>
+        </p:nvSpPr>
+        <p:spPr>
+          <a:xfrm>
+            <a:off x="2503627" y="1545336"/>
+            <a:ext cx="7154265" cy="4471416"/>
+          </a:xfrm>
+          <a:prstGeom prst="rect">
+            <a:avLst/>
+          </a:prstGeom>
+          <a:noFill/>
+          <a:ln w="15875">
+            <a:solidFill>
+              <a:srgbClr val="3A554E"/>
+            </a:solidFill>
+          </a:ln>
+        </p:spPr>
+        <p:style>
+          <a:lnRef idx="1">
+            <a:schemeClr val="accent1"/>
+          </a:lnRef>
+          <a:fillRef idx="3">
+            <a:schemeClr val="accent1"/>
+          </a:fillRef>
+          <a:effectRef idx="2">
+            <a:schemeClr val="accent1"/>
+          </a:effectRef>
+          <a:fontRef idx="minor">
+            <a:schemeClr val="lt1"/>
+          </a:fontRef>
+        </p:style>
+        <p:txBody>
+          <a:bodyPr rtlCol="0" anchor="ctr"/>
+          <a:lstStyle/>
+          <a:p>
+            <a:pPr algn="ctr"/>
+          </a:p>
+        </p:txBody>
+      </p:sp>
+      <p:sp>
+        <p:nvSpPr>
+          <p:cNvPr id="14" name="TextBox 13"/>
           <p:cNvSpPr txBox="1"/>
           <p:nvPr/>
         </p:nvSpPr>
@@ -5842,7 +6868,7 @@
             <a:r>
               <a:rPr sz="1100" b="0">
                 <a:solidFill>
-                  <a:srgbClr val="66756E"/>
+                  <a:srgbClr val="8AA199"/>
                 </a:solidFill>
                 <a:latin typeface="Calibri"/>
               </a:rPr>
@@ -5853,7 +6879,7 @@
       </p:sp>
       <p:sp>
         <p:nvSpPr>
-          <p:cNvPr id="7" name="TextBox 6"/>
+          <p:cNvPr id="15" name="TextBox 14"/>
           <p:cNvSpPr txBox="1"/>
           <p:nvPr/>
         </p:nvSpPr>
@@ -5877,7 +6903,7 @@
             <a:r>
               <a:rPr sz="1100" b="0">
                 <a:solidFill>
-                  <a:srgbClr val="66756E"/>
+                  <a:srgbClr val="8AA199"/>
                 </a:solidFill>
                 <a:latin typeface="Calibri"/>
               </a:rPr>
@@ -5919,7 +6945,7 @@
             <a:avLst/>
           </a:prstGeom>
           <a:solidFill>
-            <a:srgbClr val="F3EEE4"/>
+            <a:srgbClr val="0F2824"/>
           </a:solidFill>
           <a:ln>
             <a:noFill/>
@@ -5955,8 +6981,8 @@
         </p:nvSpPr>
         <p:spPr>
           <a:xfrm>
-            <a:off x="457200" y="228600"/>
-            <a:ext cx="10972800" cy="274320"/>
+            <a:off x="502920" y="256032"/>
+            <a:ext cx="10972800" cy="256032"/>
           </a:xfrm>
           <a:prstGeom prst="rect">
             <a:avLst/>
@@ -5990,8 +7016,8 @@
         </p:nvSpPr>
         <p:spPr>
           <a:xfrm>
-            <a:off x="457200" y="502920"/>
-            <a:ext cx="10972800" cy="457200"/>
+            <a:off x="502920" y="502920"/>
+            <a:ext cx="10972800" cy="411480"/>
           </a:xfrm>
           <a:prstGeom prst="rect">
             <a:avLst/>
@@ -6008,7 +7034,7 @@
             <a:r>
               <a:rPr sz="2200" b="1">
                 <a:solidFill>
-                  <a:srgbClr val="17241F"/>
+                  <a:srgbClr val="FFFCF7"/>
                 </a:solidFill>
                 <a:latin typeface="Georgia"/>
               </a:rPr>
@@ -6017,9 +7043,308 @@
           </a:p>
         </p:txBody>
       </p:sp>
+      <p:sp>
+        <p:nvSpPr>
+          <p:cNvPr id="5" name="Rounded Rectangle 4"/>
+          <p:cNvSpPr/>
+          <p:nvPr/>
+        </p:nvSpPr>
+        <p:spPr>
+          <a:xfrm>
+            <a:off x="502920" y="1051560"/>
+            <a:ext cx="11155680" cy="5074920"/>
+          </a:xfrm>
+          <a:prstGeom prst="roundRect">
+            <a:avLst>
+              <a:gd name="adj" fmla="val 4000"/>
+            </a:avLst>
+          </a:prstGeom>
+          <a:solidFill>
+            <a:srgbClr val="182E2A"/>
+          </a:solidFill>
+          <a:ln>
+            <a:solidFill>
+              <a:srgbClr val="2F4A44"/>
+            </a:solidFill>
+          </a:ln>
+        </p:spPr>
+        <p:style>
+          <a:lnRef idx="1">
+            <a:schemeClr val="accent1"/>
+          </a:lnRef>
+          <a:fillRef idx="3">
+            <a:schemeClr val="accent1"/>
+          </a:fillRef>
+          <a:effectRef idx="2">
+            <a:schemeClr val="accent1"/>
+          </a:effectRef>
+          <a:fontRef idx="minor">
+            <a:schemeClr val="lt1"/>
+          </a:fontRef>
+        </p:style>
+        <p:txBody>
+          <a:bodyPr rtlCol="0" anchor="ctr"/>
+          <a:lstStyle/>
+          <a:p>
+            <a:pPr algn="ctr"/>
+          </a:p>
+        </p:txBody>
+      </p:sp>
+      <p:sp>
+        <p:nvSpPr>
+          <p:cNvPr id="6" name="Rectangle 5"/>
+          <p:cNvSpPr/>
+          <p:nvPr/>
+        </p:nvSpPr>
+        <p:spPr>
+          <a:xfrm>
+            <a:off x="502920" y="1051560"/>
+            <a:ext cx="11155680" cy="384048"/>
+          </a:xfrm>
+          <a:prstGeom prst="rect">
+            <a:avLst/>
+          </a:prstGeom>
+          <a:solidFill>
+            <a:srgbClr val="243C37"/>
+          </a:solidFill>
+          <a:ln>
+            <a:noFill/>
+          </a:ln>
+        </p:spPr>
+        <p:style>
+          <a:lnRef idx="1">
+            <a:schemeClr val="accent1"/>
+          </a:lnRef>
+          <a:fillRef idx="3">
+            <a:schemeClr val="accent1"/>
+          </a:fillRef>
+          <a:effectRef idx="2">
+            <a:schemeClr val="accent1"/>
+          </a:effectRef>
+          <a:fontRef idx="minor">
+            <a:schemeClr val="lt1"/>
+          </a:fontRef>
+        </p:style>
+        <p:txBody>
+          <a:bodyPr rtlCol="0" anchor="ctr"/>
+          <a:lstStyle/>
+          <a:p>
+            <a:pPr algn="ctr"/>
+          </a:p>
+        </p:txBody>
+      </p:sp>
+      <p:sp>
+        <p:nvSpPr>
+          <p:cNvPr id="7" name="Oval 6"/>
+          <p:cNvSpPr/>
+          <p:nvPr/>
+        </p:nvSpPr>
+        <p:spPr>
+          <a:xfrm>
+            <a:off x="667512" y="1170432"/>
+            <a:ext cx="146304" cy="146304"/>
+          </a:xfrm>
+          <a:prstGeom prst="ellipse">
+            <a:avLst/>
+          </a:prstGeom>
+          <a:solidFill>
+            <a:srgbClr val="C76B5A"/>
+          </a:solidFill>
+          <a:ln>
+            <a:noFill/>
+          </a:ln>
+        </p:spPr>
+        <p:style>
+          <a:lnRef idx="1">
+            <a:schemeClr val="accent1"/>
+          </a:lnRef>
+          <a:fillRef idx="3">
+            <a:schemeClr val="accent1"/>
+          </a:fillRef>
+          <a:effectRef idx="2">
+            <a:schemeClr val="accent1"/>
+          </a:effectRef>
+          <a:fontRef idx="minor">
+            <a:schemeClr val="lt1"/>
+          </a:fontRef>
+        </p:style>
+        <p:txBody>
+          <a:bodyPr rtlCol="0" anchor="ctr"/>
+          <a:lstStyle/>
+          <a:p>
+            <a:pPr algn="ctr"/>
+          </a:p>
+        </p:txBody>
+      </p:sp>
+      <p:sp>
+        <p:nvSpPr>
+          <p:cNvPr id="8" name="Oval 7"/>
+          <p:cNvSpPr/>
+          <p:nvPr/>
+        </p:nvSpPr>
+        <p:spPr>
+          <a:xfrm>
+            <a:off x="923544" y="1170432"/>
+            <a:ext cx="146304" cy="146304"/>
+          </a:xfrm>
+          <a:prstGeom prst="ellipse">
+            <a:avLst/>
+          </a:prstGeom>
+          <a:solidFill>
+            <a:srgbClr val="C9A05C"/>
+          </a:solidFill>
+          <a:ln>
+            <a:noFill/>
+          </a:ln>
+        </p:spPr>
+        <p:style>
+          <a:lnRef idx="1">
+            <a:schemeClr val="accent1"/>
+          </a:lnRef>
+          <a:fillRef idx="3">
+            <a:schemeClr val="accent1"/>
+          </a:fillRef>
+          <a:effectRef idx="2">
+            <a:schemeClr val="accent1"/>
+          </a:effectRef>
+          <a:fontRef idx="minor">
+            <a:schemeClr val="lt1"/>
+          </a:fontRef>
+        </p:style>
+        <p:txBody>
+          <a:bodyPr rtlCol="0" anchor="ctr"/>
+          <a:lstStyle/>
+          <a:p>
+            <a:pPr algn="ctr"/>
+          </a:p>
+        </p:txBody>
+      </p:sp>
+      <p:sp>
+        <p:nvSpPr>
+          <p:cNvPr id="9" name="Oval 8"/>
+          <p:cNvSpPr/>
+          <p:nvPr/>
+        </p:nvSpPr>
+        <p:spPr>
+          <a:xfrm>
+            <a:off x="1179576" y="1170432"/>
+            <a:ext cx="146304" cy="146304"/>
+          </a:xfrm>
+          <a:prstGeom prst="ellipse">
+            <a:avLst/>
+          </a:prstGeom>
+          <a:solidFill>
+            <a:srgbClr val="5E9A72"/>
+          </a:solidFill>
+          <a:ln>
+            <a:noFill/>
+          </a:ln>
+        </p:spPr>
+        <p:style>
+          <a:lnRef idx="1">
+            <a:schemeClr val="accent1"/>
+          </a:lnRef>
+          <a:fillRef idx="3">
+            <a:schemeClr val="accent1"/>
+          </a:fillRef>
+          <a:effectRef idx="2">
+            <a:schemeClr val="accent1"/>
+          </a:effectRef>
+          <a:fontRef idx="minor">
+            <a:schemeClr val="lt1"/>
+          </a:fontRef>
+        </p:style>
+        <p:txBody>
+          <a:bodyPr rtlCol="0" anchor="ctr"/>
+          <a:lstStyle/>
+          <a:p>
+            <a:pPr algn="ctr"/>
+          </a:p>
+        </p:txBody>
+      </p:sp>
+      <p:sp>
+        <p:nvSpPr>
+          <p:cNvPr id="10" name="Rounded Rectangle 9"/>
+          <p:cNvSpPr/>
+          <p:nvPr/>
+        </p:nvSpPr>
+        <p:spPr>
+          <a:xfrm>
+            <a:off x="1691640" y="1124712"/>
+            <a:ext cx="9692640" cy="237744"/>
+          </a:xfrm>
+          <a:prstGeom prst="roundRect">
+            <a:avLst>
+              <a:gd name="adj" fmla="val 50000"/>
+            </a:avLst>
+          </a:prstGeom>
+          <a:solidFill>
+            <a:srgbClr val="12221F"/>
+          </a:solidFill>
+          <a:ln>
+            <a:noFill/>
+          </a:ln>
+        </p:spPr>
+        <p:style>
+          <a:lnRef idx="1">
+            <a:schemeClr val="accent1"/>
+          </a:lnRef>
+          <a:fillRef idx="3">
+            <a:schemeClr val="accent1"/>
+          </a:fillRef>
+          <a:effectRef idx="2">
+            <a:schemeClr val="accent1"/>
+          </a:effectRef>
+          <a:fontRef idx="minor">
+            <a:schemeClr val="lt1"/>
+          </a:fontRef>
+        </p:style>
+        <p:txBody>
+          <a:bodyPr rtlCol="0" anchor="ctr"/>
+          <a:lstStyle/>
+          <a:p>
+            <a:pPr algn="ctr"/>
+          </a:p>
+        </p:txBody>
+      </p:sp>
+      <p:sp>
+        <p:nvSpPr>
+          <p:cNvPr id="11" name="TextBox 10"/>
+          <p:cNvSpPr txBox="1"/>
+          <p:nvPr/>
+        </p:nvSpPr>
+        <p:spPr>
+          <a:xfrm>
+            <a:off x="1828800" y="1124712"/>
+            <a:ext cx="9509760" cy="237744"/>
+          </a:xfrm>
+          <a:prstGeom prst="rect">
+            <a:avLst/>
+          </a:prstGeom>
+          <a:noFill/>
+        </p:spPr>
+        <p:txBody>
+          <a:bodyPr wrap="square">
+            <a:spAutoFit/>
+          </a:bodyPr>
+          <a:lstStyle/>
+          <a:p>
+            <a:pPr algn="l"/>
+            <a:r>
+              <a:rPr sz="1000" b="0">
+                <a:solidFill>
+                  <a:srgbClr val="A8B9B3"/>
+                </a:solidFill>
+                <a:latin typeface="Calibri"/>
+              </a:rPr>
+              <a:t>leshahker.github.io/bsaer-mockup/library.html#protocols</a:t>
+            </a:r>
+          </a:p>
+        </p:txBody>
+      </p:sp>
       <p:pic>
         <p:nvPicPr>
-          <p:cNvPr id="5" name="Picture 4" descr="08-library-protocols.png"/>
+          <p:cNvPr id="12" name="Picture 11" descr="08-library-protocols.png"/>
           <p:cNvPicPr>
             <a:picLocks noChangeAspect="1"/>
           </p:cNvPicPr>
@@ -6033,8 +7358,8 @@
         </p:blipFill>
         <p:spPr>
           <a:xfrm>
-            <a:off x="731520" y="1097280"/>
-            <a:ext cx="8046720" cy="5029200"/>
+            <a:off x="2503627" y="1545336"/>
+            <a:ext cx="7154265" cy="4471416"/>
           </a:xfrm>
           <a:prstGeom prst="rect">
             <a:avLst/>
@@ -6043,7 +7368,50 @@
       </p:pic>
       <p:sp>
         <p:nvSpPr>
-          <p:cNvPr id="6" name="TextBox 5"/>
+          <p:cNvPr id="13" name="Rectangle 12"/>
+          <p:cNvSpPr/>
+          <p:nvPr/>
+        </p:nvSpPr>
+        <p:spPr>
+          <a:xfrm>
+            <a:off x="2503627" y="1545336"/>
+            <a:ext cx="7154265" cy="4471416"/>
+          </a:xfrm>
+          <a:prstGeom prst="rect">
+            <a:avLst/>
+          </a:prstGeom>
+          <a:noFill/>
+          <a:ln w="15875">
+            <a:solidFill>
+              <a:srgbClr val="3A554E"/>
+            </a:solidFill>
+          </a:ln>
+        </p:spPr>
+        <p:style>
+          <a:lnRef idx="1">
+            <a:schemeClr val="accent1"/>
+          </a:lnRef>
+          <a:fillRef idx="3">
+            <a:schemeClr val="accent1"/>
+          </a:fillRef>
+          <a:effectRef idx="2">
+            <a:schemeClr val="accent1"/>
+          </a:effectRef>
+          <a:fontRef idx="minor">
+            <a:schemeClr val="lt1"/>
+          </a:fontRef>
+        </p:style>
+        <p:txBody>
+          <a:bodyPr rtlCol="0" anchor="ctr"/>
+          <a:lstStyle/>
+          <a:p>
+            <a:pPr algn="ctr"/>
+          </a:p>
+        </p:txBody>
+      </p:sp>
+      <p:sp>
+        <p:nvSpPr>
+          <p:cNvPr id="14" name="TextBox 13"/>
           <p:cNvSpPr txBox="1"/>
           <p:nvPr/>
         </p:nvSpPr>
@@ -6067,7 +7435,7 @@
             <a:r>
               <a:rPr sz="1100" b="0">
                 <a:solidFill>
-                  <a:srgbClr val="66756E"/>
+                  <a:srgbClr val="8AA199"/>
                 </a:solidFill>
                 <a:latin typeface="Calibri"/>
               </a:rPr>
@@ -6078,7 +7446,7 @@
       </p:sp>
       <p:sp>
         <p:nvSpPr>
-          <p:cNvPr id="7" name="TextBox 6"/>
+          <p:cNvPr id="15" name="TextBox 14"/>
           <p:cNvSpPr txBox="1"/>
           <p:nvPr/>
         </p:nvSpPr>
@@ -6102,7 +7470,7 @@
             <a:r>
               <a:rPr sz="1100" b="0">
                 <a:solidFill>
-                  <a:srgbClr val="66756E"/>
+                  <a:srgbClr val="8AA199"/>
                 </a:solidFill>
                 <a:latin typeface="Calibri"/>
               </a:rPr>
@@ -6144,7 +7512,7 @@
             <a:avLst/>
           </a:prstGeom>
           <a:solidFill>
-            <a:srgbClr val="F3EEE4"/>
+            <a:srgbClr val="0F2824"/>
           </a:solidFill>
           <a:ln>
             <a:noFill/>
@@ -6180,8 +7548,8 @@
         </p:nvSpPr>
         <p:spPr>
           <a:xfrm>
-            <a:off x="457200" y="228600"/>
-            <a:ext cx="10972800" cy="274320"/>
+            <a:off x="502920" y="256032"/>
+            <a:ext cx="10972800" cy="256032"/>
           </a:xfrm>
           <a:prstGeom prst="rect">
             <a:avLst/>
@@ -6215,8 +7583,8 @@
         </p:nvSpPr>
         <p:spPr>
           <a:xfrm>
-            <a:off x="457200" y="502920"/>
-            <a:ext cx="10972800" cy="457200"/>
+            <a:off x="502920" y="502920"/>
+            <a:ext cx="10972800" cy="411480"/>
           </a:xfrm>
           <a:prstGeom prst="rect">
             <a:avLst/>
@@ -6233,7 +7601,7 @@
             <a:r>
               <a:rPr sz="2200" b="1">
                 <a:solidFill>
-                  <a:srgbClr val="17241F"/>
+                  <a:srgbClr val="FFFCF7"/>
                 </a:solidFill>
                 <a:latin typeface="Georgia"/>
               </a:rPr>
@@ -6242,9 +7610,308 @@
           </a:p>
         </p:txBody>
       </p:sp>
+      <p:sp>
+        <p:nvSpPr>
+          <p:cNvPr id="5" name="Rounded Rectangle 4"/>
+          <p:cNvSpPr/>
+          <p:nvPr/>
+        </p:nvSpPr>
+        <p:spPr>
+          <a:xfrm>
+            <a:off x="502920" y="1051560"/>
+            <a:ext cx="11155680" cy="5074920"/>
+          </a:xfrm>
+          <a:prstGeom prst="roundRect">
+            <a:avLst>
+              <a:gd name="adj" fmla="val 4000"/>
+            </a:avLst>
+          </a:prstGeom>
+          <a:solidFill>
+            <a:srgbClr val="182E2A"/>
+          </a:solidFill>
+          <a:ln>
+            <a:solidFill>
+              <a:srgbClr val="2F4A44"/>
+            </a:solidFill>
+          </a:ln>
+        </p:spPr>
+        <p:style>
+          <a:lnRef idx="1">
+            <a:schemeClr val="accent1"/>
+          </a:lnRef>
+          <a:fillRef idx="3">
+            <a:schemeClr val="accent1"/>
+          </a:fillRef>
+          <a:effectRef idx="2">
+            <a:schemeClr val="accent1"/>
+          </a:effectRef>
+          <a:fontRef idx="minor">
+            <a:schemeClr val="lt1"/>
+          </a:fontRef>
+        </p:style>
+        <p:txBody>
+          <a:bodyPr rtlCol="0" anchor="ctr"/>
+          <a:lstStyle/>
+          <a:p>
+            <a:pPr algn="ctr"/>
+          </a:p>
+        </p:txBody>
+      </p:sp>
+      <p:sp>
+        <p:nvSpPr>
+          <p:cNvPr id="6" name="Rectangle 5"/>
+          <p:cNvSpPr/>
+          <p:nvPr/>
+        </p:nvSpPr>
+        <p:spPr>
+          <a:xfrm>
+            <a:off x="502920" y="1051560"/>
+            <a:ext cx="11155680" cy="384048"/>
+          </a:xfrm>
+          <a:prstGeom prst="rect">
+            <a:avLst/>
+          </a:prstGeom>
+          <a:solidFill>
+            <a:srgbClr val="243C37"/>
+          </a:solidFill>
+          <a:ln>
+            <a:noFill/>
+          </a:ln>
+        </p:spPr>
+        <p:style>
+          <a:lnRef idx="1">
+            <a:schemeClr val="accent1"/>
+          </a:lnRef>
+          <a:fillRef idx="3">
+            <a:schemeClr val="accent1"/>
+          </a:fillRef>
+          <a:effectRef idx="2">
+            <a:schemeClr val="accent1"/>
+          </a:effectRef>
+          <a:fontRef idx="minor">
+            <a:schemeClr val="lt1"/>
+          </a:fontRef>
+        </p:style>
+        <p:txBody>
+          <a:bodyPr rtlCol="0" anchor="ctr"/>
+          <a:lstStyle/>
+          <a:p>
+            <a:pPr algn="ctr"/>
+          </a:p>
+        </p:txBody>
+      </p:sp>
+      <p:sp>
+        <p:nvSpPr>
+          <p:cNvPr id="7" name="Oval 6"/>
+          <p:cNvSpPr/>
+          <p:nvPr/>
+        </p:nvSpPr>
+        <p:spPr>
+          <a:xfrm>
+            <a:off x="667512" y="1170432"/>
+            <a:ext cx="146304" cy="146304"/>
+          </a:xfrm>
+          <a:prstGeom prst="ellipse">
+            <a:avLst/>
+          </a:prstGeom>
+          <a:solidFill>
+            <a:srgbClr val="C76B5A"/>
+          </a:solidFill>
+          <a:ln>
+            <a:noFill/>
+          </a:ln>
+        </p:spPr>
+        <p:style>
+          <a:lnRef idx="1">
+            <a:schemeClr val="accent1"/>
+          </a:lnRef>
+          <a:fillRef idx="3">
+            <a:schemeClr val="accent1"/>
+          </a:fillRef>
+          <a:effectRef idx="2">
+            <a:schemeClr val="accent1"/>
+          </a:effectRef>
+          <a:fontRef idx="minor">
+            <a:schemeClr val="lt1"/>
+          </a:fontRef>
+        </p:style>
+        <p:txBody>
+          <a:bodyPr rtlCol="0" anchor="ctr"/>
+          <a:lstStyle/>
+          <a:p>
+            <a:pPr algn="ctr"/>
+          </a:p>
+        </p:txBody>
+      </p:sp>
+      <p:sp>
+        <p:nvSpPr>
+          <p:cNvPr id="8" name="Oval 7"/>
+          <p:cNvSpPr/>
+          <p:nvPr/>
+        </p:nvSpPr>
+        <p:spPr>
+          <a:xfrm>
+            <a:off x="923544" y="1170432"/>
+            <a:ext cx="146304" cy="146304"/>
+          </a:xfrm>
+          <a:prstGeom prst="ellipse">
+            <a:avLst/>
+          </a:prstGeom>
+          <a:solidFill>
+            <a:srgbClr val="C9A05C"/>
+          </a:solidFill>
+          <a:ln>
+            <a:noFill/>
+          </a:ln>
+        </p:spPr>
+        <p:style>
+          <a:lnRef idx="1">
+            <a:schemeClr val="accent1"/>
+          </a:lnRef>
+          <a:fillRef idx="3">
+            <a:schemeClr val="accent1"/>
+          </a:fillRef>
+          <a:effectRef idx="2">
+            <a:schemeClr val="accent1"/>
+          </a:effectRef>
+          <a:fontRef idx="minor">
+            <a:schemeClr val="lt1"/>
+          </a:fontRef>
+        </p:style>
+        <p:txBody>
+          <a:bodyPr rtlCol="0" anchor="ctr"/>
+          <a:lstStyle/>
+          <a:p>
+            <a:pPr algn="ctr"/>
+          </a:p>
+        </p:txBody>
+      </p:sp>
+      <p:sp>
+        <p:nvSpPr>
+          <p:cNvPr id="9" name="Oval 8"/>
+          <p:cNvSpPr/>
+          <p:nvPr/>
+        </p:nvSpPr>
+        <p:spPr>
+          <a:xfrm>
+            <a:off x="1179576" y="1170432"/>
+            <a:ext cx="146304" cy="146304"/>
+          </a:xfrm>
+          <a:prstGeom prst="ellipse">
+            <a:avLst/>
+          </a:prstGeom>
+          <a:solidFill>
+            <a:srgbClr val="5E9A72"/>
+          </a:solidFill>
+          <a:ln>
+            <a:noFill/>
+          </a:ln>
+        </p:spPr>
+        <p:style>
+          <a:lnRef idx="1">
+            <a:schemeClr val="accent1"/>
+          </a:lnRef>
+          <a:fillRef idx="3">
+            <a:schemeClr val="accent1"/>
+          </a:fillRef>
+          <a:effectRef idx="2">
+            <a:schemeClr val="accent1"/>
+          </a:effectRef>
+          <a:fontRef idx="minor">
+            <a:schemeClr val="lt1"/>
+          </a:fontRef>
+        </p:style>
+        <p:txBody>
+          <a:bodyPr rtlCol="0" anchor="ctr"/>
+          <a:lstStyle/>
+          <a:p>
+            <a:pPr algn="ctr"/>
+          </a:p>
+        </p:txBody>
+      </p:sp>
+      <p:sp>
+        <p:nvSpPr>
+          <p:cNvPr id="10" name="Rounded Rectangle 9"/>
+          <p:cNvSpPr/>
+          <p:nvPr/>
+        </p:nvSpPr>
+        <p:spPr>
+          <a:xfrm>
+            <a:off x="1691640" y="1124712"/>
+            <a:ext cx="9692640" cy="237744"/>
+          </a:xfrm>
+          <a:prstGeom prst="roundRect">
+            <a:avLst>
+              <a:gd name="adj" fmla="val 50000"/>
+            </a:avLst>
+          </a:prstGeom>
+          <a:solidFill>
+            <a:srgbClr val="12221F"/>
+          </a:solidFill>
+          <a:ln>
+            <a:noFill/>
+          </a:ln>
+        </p:spPr>
+        <p:style>
+          <a:lnRef idx="1">
+            <a:schemeClr val="accent1"/>
+          </a:lnRef>
+          <a:fillRef idx="3">
+            <a:schemeClr val="accent1"/>
+          </a:fillRef>
+          <a:effectRef idx="2">
+            <a:schemeClr val="accent1"/>
+          </a:effectRef>
+          <a:fontRef idx="minor">
+            <a:schemeClr val="lt1"/>
+          </a:fontRef>
+        </p:style>
+        <p:txBody>
+          <a:bodyPr rtlCol="0" anchor="ctr"/>
+          <a:lstStyle/>
+          <a:p>
+            <a:pPr algn="ctr"/>
+          </a:p>
+        </p:txBody>
+      </p:sp>
+      <p:sp>
+        <p:nvSpPr>
+          <p:cNvPr id="11" name="TextBox 10"/>
+          <p:cNvSpPr txBox="1"/>
+          <p:nvPr/>
+        </p:nvSpPr>
+        <p:spPr>
+          <a:xfrm>
+            <a:off x="1828800" y="1124712"/>
+            <a:ext cx="9509760" cy="237744"/>
+          </a:xfrm>
+          <a:prstGeom prst="rect">
+            <a:avLst/>
+          </a:prstGeom>
+          <a:noFill/>
+        </p:spPr>
+        <p:txBody>
+          <a:bodyPr wrap="square">
+            <a:spAutoFit/>
+          </a:bodyPr>
+          <a:lstStyle/>
+          <a:p>
+            <a:pPr algn="l"/>
+            <a:r>
+              <a:rPr sz="1000" b="0">
+                <a:solidFill>
+                  <a:srgbClr val="A8B9B3"/>
+                </a:solidFill>
+                <a:latin typeface="Calibri"/>
+              </a:rPr>
+              <a:t>leshahker.github.io/bsaer-mockup/events.html</a:t>
+            </a:r>
+          </a:p>
+        </p:txBody>
+      </p:sp>
       <p:pic>
         <p:nvPicPr>
-          <p:cNvPr id="5" name="Picture 4" descr="03-events.png"/>
+          <p:cNvPr id="12" name="Picture 11" descr="03-events.png"/>
           <p:cNvPicPr>
             <a:picLocks noChangeAspect="1"/>
           </p:cNvPicPr>
@@ -6258,8 +7925,8 @@
         </p:blipFill>
         <p:spPr>
           <a:xfrm>
-            <a:off x="731520" y="1097280"/>
-            <a:ext cx="8046720" cy="5029200"/>
+            <a:off x="2503627" y="1545336"/>
+            <a:ext cx="7154265" cy="4471416"/>
           </a:xfrm>
           <a:prstGeom prst="rect">
             <a:avLst/>
@@ -6268,7 +7935,50 @@
       </p:pic>
       <p:sp>
         <p:nvSpPr>
-          <p:cNvPr id="6" name="TextBox 5"/>
+          <p:cNvPr id="13" name="Rectangle 12"/>
+          <p:cNvSpPr/>
+          <p:nvPr/>
+        </p:nvSpPr>
+        <p:spPr>
+          <a:xfrm>
+            <a:off x="2503627" y="1545336"/>
+            <a:ext cx="7154265" cy="4471416"/>
+          </a:xfrm>
+          <a:prstGeom prst="rect">
+            <a:avLst/>
+          </a:prstGeom>
+          <a:noFill/>
+          <a:ln w="15875">
+            <a:solidFill>
+              <a:srgbClr val="3A554E"/>
+            </a:solidFill>
+          </a:ln>
+        </p:spPr>
+        <p:style>
+          <a:lnRef idx="1">
+            <a:schemeClr val="accent1"/>
+          </a:lnRef>
+          <a:fillRef idx="3">
+            <a:schemeClr val="accent1"/>
+          </a:fillRef>
+          <a:effectRef idx="2">
+            <a:schemeClr val="accent1"/>
+          </a:effectRef>
+          <a:fontRef idx="minor">
+            <a:schemeClr val="lt1"/>
+          </a:fontRef>
+        </p:style>
+        <p:txBody>
+          <a:bodyPr rtlCol="0" anchor="ctr"/>
+          <a:lstStyle/>
+          <a:p>
+            <a:pPr algn="ctr"/>
+          </a:p>
+        </p:txBody>
+      </p:sp>
+      <p:sp>
+        <p:nvSpPr>
+          <p:cNvPr id="14" name="TextBox 13"/>
           <p:cNvSpPr txBox="1"/>
           <p:nvPr/>
         </p:nvSpPr>
@@ -6292,7 +8002,7 @@
             <a:r>
               <a:rPr sz="1100" b="0">
                 <a:solidFill>
-                  <a:srgbClr val="66756E"/>
+                  <a:srgbClr val="8AA199"/>
                 </a:solidFill>
                 <a:latin typeface="Calibri"/>
               </a:rPr>
@@ -6303,7 +8013,7 @@
       </p:sp>
       <p:sp>
         <p:nvSpPr>
-          <p:cNvPr id="7" name="TextBox 6"/>
+          <p:cNvPr id="15" name="TextBox 14"/>
           <p:cNvSpPr txBox="1"/>
           <p:nvPr/>
         </p:nvSpPr>
@@ -6327,7 +8037,7 @@
             <a:r>
               <a:rPr sz="1100" b="0">
                 <a:solidFill>
-                  <a:srgbClr val="66756E"/>
+                  <a:srgbClr val="8AA199"/>
                 </a:solidFill>
                 <a:latin typeface="Calibri"/>
               </a:rPr>
@@ -6369,7 +8079,7 @@
             <a:avLst/>
           </a:prstGeom>
           <a:solidFill>
-            <a:srgbClr val="F3EEE4"/>
+            <a:srgbClr val="0F2824"/>
           </a:solidFill>
           <a:ln>
             <a:noFill/>
@@ -6405,8 +8115,8 @@
         </p:nvSpPr>
         <p:spPr>
           <a:xfrm>
-            <a:off x="457200" y="228600"/>
-            <a:ext cx="10972800" cy="274320"/>
+            <a:off x="502920" y="256032"/>
+            <a:ext cx="10972800" cy="256032"/>
           </a:xfrm>
           <a:prstGeom prst="rect">
             <a:avLst/>
@@ -6440,8 +8150,8 @@
         </p:nvSpPr>
         <p:spPr>
           <a:xfrm>
-            <a:off x="457200" y="502920"/>
-            <a:ext cx="10972800" cy="457200"/>
+            <a:off x="502920" y="502920"/>
+            <a:ext cx="10972800" cy="411480"/>
           </a:xfrm>
           <a:prstGeom prst="rect">
             <a:avLst/>
@@ -6458,7 +8168,7 @@
             <a:r>
               <a:rPr sz="2200" b="1">
                 <a:solidFill>
-                  <a:srgbClr val="17241F"/>
+                  <a:srgbClr val="FFFCF7"/>
                 </a:solidFill>
                 <a:latin typeface="Georgia"/>
               </a:rPr>
@@ -6467,9 +8177,308 @@
           </a:p>
         </p:txBody>
       </p:sp>
+      <p:sp>
+        <p:nvSpPr>
+          <p:cNvPr id="5" name="Rounded Rectangle 4"/>
+          <p:cNvSpPr/>
+          <p:nvPr/>
+        </p:nvSpPr>
+        <p:spPr>
+          <a:xfrm>
+            <a:off x="502920" y="1051560"/>
+            <a:ext cx="11155680" cy="5074920"/>
+          </a:xfrm>
+          <a:prstGeom prst="roundRect">
+            <a:avLst>
+              <a:gd name="adj" fmla="val 4000"/>
+            </a:avLst>
+          </a:prstGeom>
+          <a:solidFill>
+            <a:srgbClr val="182E2A"/>
+          </a:solidFill>
+          <a:ln>
+            <a:solidFill>
+              <a:srgbClr val="2F4A44"/>
+            </a:solidFill>
+          </a:ln>
+        </p:spPr>
+        <p:style>
+          <a:lnRef idx="1">
+            <a:schemeClr val="accent1"/>
+          </a:lnRef>
+          <a:fillRef idx="3">
+            <a:schemeClr val="accent1"/>
+          </a:fillRef>
+          <a:effectRef idx="2">
+            <a:schemeClr val="accent1"/>
+          </a:effectRef>
+          <a:fontRef idx="minor">
+            <a:schemeClr val="lt1"/>
+          </a:fontRef>
+        </p:style>
+        <p:txBody>
+          <a:bodyPr rtlCol="0" anchor="ctr"/>
+          <a:lstStyle/>
+          <a:p>
+            <a:pPr algn="ctr"/>
+          </a:p>
+        </p:txBody>
+      </p:sp>
+      <p:sp>
+        <p:nvSpPr>
+          <p:cNvPr id="6" name="Rectangle 5"/>
+          <p:cNvSpPr/>
+          <p:nvPr/>
+        </p:nvSpPr>
+        <p:spPr>
+          <a:xfrm>
+            <a:off x="502920" y="1051560"/>
+            <a:ext cx="11155680" cy="384048"/>
+          </a:xfrm>
+          <a:prstGeom prst="rect">
+            <a:avLst/>
+          </a:prstGeom>
+          <a:solidFill>
+            <a:srgbClr val="243C37"/>
+          </a:solidFill>
+          <a:ln>
+            <a:noFill/>
+          </a:ln>
+        </p:spPr>
+        <p:style>
+          <a:lnRef idx="1">
+            <a:schemeClr val="accent1"/>
+          </a:lnRef>
+          <a:fillRef idx="3">
+            <a:schemeClr val="accent1"/>
+          </a:fillRef>
+          <a:effectRef idx="2">
+            <a:schemeClr val="accent1"/>
+          </a:effectRef>
+          <a:fontRef idx="minor">
+            <a:schemeClr val="lt1"/>
+          </a:fontRef>
+        </p:style>
+        <p:txBody>
+          <a:bodyPr rtlCol="0" anchor="ctr"/>
+          <a:lstStyle/>
+          <a:p>
+            <a:pPr algn="ctr"/>
+          </a:p>
+        </p:txBody>
+      </p:sp>
+      <p:sp>
+        <p:nvSpPr>
+          <p:cNvPr id="7" name="Oval 6"/>
+          <p:cNvSpPr/>
+          <p:nvPr/>
+        </p:nvSpPr>
+        <p:spPr>
+          <a:xfrm>
+            <a:off x="667512" y="1170432"/>
+            <a:ext cx="146304" cy="146304"/>
+          </a:xfrm>
+          <a:prstGeom prst="ellipse">
+            <a:avLst/>
+          </a:prstGeom>
+          <a:solidFill>
+            <a:srgbClr val="C76B5A"/>
+          </a:solidFill>
+          <a:ln>
+            <a:noFill/>
+          </a:ln>
+        </p:spPr>
+        <p:style>
+          <a:lnRef idx="1">
+            <a:schemeClr val="accent1"/>
+          </a:lnRef>
+          <a:fillRef idx="3">
+            <a:schemeClr val="accent1"/>
+          </a:fillRef>
+          <a:effectRef idx="2">
+            <a:schemeClr val="accent1"/>
+          </a:effectRef>
+          <a:fontRef idx="minor">
+            <a:schemeClr val="lt1"/>
+          </a:fontRef>
+        </p:style>
+        <p:txBody>
+          <a:bodyPr rtlCol="0" anchor="ctr"/>
+          <a:lstStyle/>
+          <a:p>
+            <a:pPr algn="ctr"/>
+          </a:p>
+        </p:txBody>
+      </p:sp>
+      <p:sp>
+        <p:nvSpPr>
+          <p:cNvPr id="8" name="Oval 7"/>
+          <p:cNvSpPr/>
+          <p:nvPr/>
+        </p:nvSpPr>
+        <p:spPr>
+          <a:xfrm>
+            <a:off x="923544" y="1170432"/>
+            <a:ext cx="146304" cy="146304"/>
+          </a:xfrm>
+          <a:prstGeom prst="ellipse">
+            <a:avLst/>
+          </a:prstGeom>
+          <a:solidFill>
+            <a:srgbClr val="C9A05C"/>
+          </a:solidFill>
+          <a:ln>
+            <a:noFill/>
+          </a:ln>
+        </p:spPr>
+        <p:style>
+          <a:lnRef idx="1">
+            <a:schemeClr val="accent1"/>
+          </a:lnRef>
+          <a:fillRef idx="3">
+            <a:schemeClr val="accent1"/>
+          </a:fillRef>
+          <a:effectRef idx="2">
+            <a:schemeClr val="accent1"/>
+          </a:effectRef>
+          <a:fontRef idx="minor">
+            <a:schemeClr val="lt1"/>
+          </a:fontRef>
+        </p:style>
+        <p:txBody>
+          <a:bodyPr rtlCol="0" anchor="ctr"/>
+          <a:lstStyle/>
+          <a:p>
+            <a:pPr algn="ctr"/>
+          </a:p>
+        </p:txBody>
+      </p:sp>
+      <p:sp>
+        <p:nvSpPr>
+          <p:cNvPr id="9" name="Oval 8"/>
+          <p:cNvSpPr/>
+          <p:nvPr/>
+        </p:nvSpPr>
+        <p:spPr>
+          <a:xfrm>
+            <a:off x="1179576" y="1170432"/>
+            <a:ext cx="146304" cy="146304"/>
+          </a:xfrm>
+          <a:prstGeom prst="ellipse">
+            <a:avLst/>
+          </a:prstGeom>
+          <a:solidFill>
+            <a:srgbClr val="5E9A72"/>
+          </a:solidFill>
+          <a:ln>
+            <a:noFill/>
+          </a:ln>
+        </p:spPr>
+        <p:style>
+          <a:lnRef idx="1">
+            <a:schemeClr val="accent1"/>
+          </a:lnRef>
+          <a:fillRef idx="3">
+            <a:schemeClr val="accent1"/>
+          </a:fillRef>
+          <a:effectRef idx="2">
+            <a:schemeClr val="accent1"/>
+          </a:effectRef>
+          <a:fontRef idx="minor">
+            <a:schemeClr val="lt1"/>
+          </a:fontRef>
+        </p:style>
+        <p:txBody>
+          <a:bodyPr rtlCol="0" anchor="ctr"/>
+          <a:lstStyle/>
+          <a:p>
+            <a:pPr algn="ctr"/>
+          </a:p>
+        </p:txBody>
+      </p:sp>
+      <p:sp>
+        <p:nvSpPr>
+          <p:cNvPr id="10" name="Rounded Rectangle 9"/>
+          <p:cNvSpPr/>
+          <p:nvPr/>
+        </p:nvSpPr>
+        <p:spPr>
+          <a:xfrm>
+            <a:off x="1691640" y="1124712"/>
+            <a:ext cx="9692640" cy="237744"/>
+          </a:xfrm>
+          <a:prstGeom prst="roundRect">
+            <a:avLst>
+              <a:gd name="adj" fmla="val 50000"/>
+            </a:avLst>
+          </a:prstGeom>
+          <a:solidFill>
+            <a:srgbClr val="12221F"/>
+          </a:solidFill>
+          <a:ln>
+            <a:noFill/>
+          </a:ln>
+        </p:spPr>
+        <p:style>
+          <a:lnRef idx="1">
+            <a:schemeClr val="accent1"/>
+          </a:lnRef>
+          <a:fillRef idx="3">
+            <a:schemeClr val="accent1"/>
+          </a:fillRef>
+          <a:effectRef idx="2">
+            <a:schemeClr val="accent1"/>
+          </a:effectRef>
+          <a:fontRef idx="minor">
+            <a:schemeClr val="lt1"/>
+          </a:fontRef>
+        </p:style>
+        <p:txBody>
+          <a:bodyPr rtlCol="0" anchor="ctr"/>
+          <a:lstStyle/>
+          <a:p>
+            <a:pPr algn="ctr"/>
+          </a:p>
+        </p:txBody>
+      </p:sp>
+      <p:sp>
+        <p:nvSpPr>
+          <p:cNvPr id="11" name="TextBox 10"/>
+          <p:cNvSpPr txBox="1"/>
+          <p:nvPr/>
+        </p:nvSpPr>
+        <p:spPr>
+          <a:xfrm>
+            <a:off x="1828800" y="1124712"/>
+            <a:ext cx="9509760" cy="237744"/>
+          </a:xfrm>
+          <a:prstGeom prst="rect">
+            <a:avLst/>
+          </a:prstGeom>
+          <a:noFill/>
+        </p:spPr>
+        <p:txBody>
+          <a:bodyPr wrap="square">
+            <a:spAutoFit/>
+          </a:bodyPr>
+          <a:lstStyle/>
+          <a:p>
+            <a:pPr algn="l"/>
+            <a:r>
+              <a:rPr sz="1000" b="0">
+                <a:solidFill>
+                  <a:srgbClr val="A8B9B3"/>
+                </a:solidFill>
+                <a:latin typeface="Calibri"/>
+              </a:rPr>
+              <a:t>leshahker.github.io/bsaer-mockup/join.html</a:t>
+            </a:r>
+          </a:p>
+        </p:txBody>
+      </p:sp>
       <p:pic>
         <p:nvPicPr>
-          <p:cNvPr id="5" name="Picture 4" descr="05-join.png"/>
+          <p:cNvPr id="12" name="Picture 11" descr="05-join.png"/>
           <p:cNvPicPr>
             <a:picLocks noChangeAspect="1"/>
           </p:cNvPicPr>
@@ -6483,8 +8492,8 @@
         </p:blipFill>
         <p:spPr>
           <a:xfrm>
-            <a:off x="731520" y="1097280"/>
-            <a:ext cx="8046720" cy="5029200"/>
+            <a:off x="2503627" y="1545336"/>
+            <a:ext cx="7154265" cy="4471416"/>
           </a:xfrm>
           <a:prstGeom prst="rect">
             <a:avLst/>
@@ -6493,7 +8502,50 @@
       </p:pic>
       <p:sp>
         <p:nvSpPr>
-          <p:cNvPr id="6" name="TextBox 5"/>
+          <p:cNvPr id="13" name="Rectangle 12"/>
+          <p:cNvSpPr/>
+          <p:nvPr/>
+        </p:nvSpPr>
+        <p:spPr>
+          <a:xfrm>
+            <a:off x="2503627" y="1545336"/>
+            <a:ext cx="7154265" cy="4471416"/>
+          </a:xfrm>
+          <a:prstGeom prst="rect">
+            <a:avLst/>
+          </a:prstGeom>
+          <a:noFill/>
+          <a:ln w="15875">
+            <a:solidFill>
+              <a:srgbClr val="3A554E"/>
+            </a:solidFill>
+          </a:ln>
+        </p:spPr>
+        <p:style>
+          <a:lnRef idx="1">
+            <a:schemeClr val="accent1"/>
+          </a:lnRef>
+          <a:fillRef idx="3">
+            <a:schemeClr val="accent1"/>
+          </a:fillRef>
+          <a:effectRef idx="2">
+            <a:schemeClr val="accent1"/>
+          </a:effectRef>
+          <a:fontRef idx="minor">
+            <a:schemeClr val="lt1"/>
+          </a:fontRef>
+        </p:style>
+        <p:txBody>
+          <a:bodyPr rtlCol="0" anchor="ctr"/>
+          <a:lstStyle/>
+          <a:p>
+            <a:pPr algn="ctr"/>
+          </a:p>
+        </p:txBody>
+      </p:sp>
+      <p:sp>
+        <p:nvSpPr>
+          <p:cNvPr id="14" name="TextBox 13"/>
           <p:cNvSpPr txBox="1"/>
           <p:nvPr/>
         </p:nvSpPr>
@@ -6517,7 +8569,7 @@
             <a:r>
               <a:rPr sz="1100" b="0">
                 <a:solidFill>
-                  <a:srgbClr val="66756E"/>
+                  <a:srgbClr val="8AA199"/>
                 </a:solidFill>
                 <a:latin typeface="Calibri"/>
               </a:rPr>
@@ -6528,7 +8580,7 @@
       </p:sp>
       <p:sp>
         <p:nvSpPr>
-          <p:cNvPr id="7" name="TextBox 6"/>
+          <p:cNvPr id="15" name="TextBox 14"/>
           <p:cNvSpPr txBox="1"/>
           <p:nvPr/>
         </p:nvSpPr>
@@ -6552,7 +8604,7 @@
             <a:r>
               <a:rPr sz="1100" b="0">
                 <a:solidFill>
-                  <a:srgbClr val="66756E"/>
+                  <a:srgbClr val="8AA199"/>
                 </a:solidFill>
                 <a:latin typeface="Calibri"/>
               </a:rPr>
@@ -6594,7 +8646,7 @@
             <a:avLst/>
           </a:prstGeom>
           <a:solidFill>
-            <a:srgbClr val="F3EEE4"/>
+            <a:srgbClr val="0F2824"/>
           </a:solidFill>
           <a:ln>
             <a:noFill/>
@@ -6630,8 +8682,8 @@
         </p:nvSpPr>
         <p:spPr>
           <a:xfrm>
-            <a:off x="457200" y="228600"/>
-            <a:ext cx="10972800" cy="274320"/>
+            <a:off x="502920" y="256032"/>
+            <a:ext cx="10972800" cy="256032"/>
           </a:xfrm>
           <a:prstGeom prst="rect">
             <a:avLst/>
@@ -6665,8 +8717,8 @@
         </p:nvSpPr>
         <p:spPr>
           <a:xfrm>
-            <a:off x="457200" y="502920"/>
-            <a:ext cx="10972800" cy="457200"/>
+            <a:off x="502920" y="502920"/>
+            <a:ext cx="10972800" cy="411480"/>
           </a:xfrm>
           <a:prstGeom prst="rect">
             <a:avLst/>
@@ -6683,7 +8735,7 @@
             <a:r>
               <a:rPr sz="2200" b="1">
                 <a:solidFill>
-                  <a:srgbClr val="17241F"/>
+                  <a:srgbClr val="FFFCF7"/>
                 </a:solidFill>
                 <a:latin typeface="Georgia"/>
               </a:rPr>
@@ -6692,9 +8744,308 @@
           </a:p>
         </p:txBody>
       </p:sp>
+      <p:sp>
+        <p:nvSpPr>
+          <p:cNvPr id="5" name="Rounded Rectangle 4"/>
+          <p:cNvSpPr/>
+          <p:nvPr/>
+        </p:nvSpPr>
+        <p:spPr>
+          <a:xfrm>
+            <a:off x="502920" y="1051560"/>
+            <a:ext cx="11155680" cy="5074920"/>
+          </a:xfrm>
+          <a:prstGeom prst="roundRect">
+            <a:avLst>
+              <a:gd name="adj" fmla="val 4000"/>
+            </a:avLst>
+          </a:prstGeom>
+          <a:solidFill>
+            <a:srgbClr val="182E2A"/>
+          </a:solidFill>
+          <a:ln>
+            <a:solidFill>
+              <a:srgbClr val="2F4A44"/>
+            </a:solidFill>
+          </a:ln>
+        </p:spPr>
+        <p:style>
+          <a:lnRef idx="1">
+            <a:schemeClr val="accent1"/>
+          </a:lnRef>
+          <a:fillRef idx="3">
+            <a:schemeClr val="accent1"/>
+          </a:fillRef>
+          <a:effectRef idx="2">
+            <a:schemeClr val="accent1"/>
+          </a:effectRef>
+          <a:fontRef idx="minor">
+            <a:schemeClr val="lt1"/>
+          </a:fontRef>
+        </p:style>
+        <p:txBody>
+          <a:bodyPr rtlCol="0" anchor="ctr"/>
+          <a:lstStyle/>
+          <a:p>
+            <a:pPr algn="ctr"/>
+          </a:p>
+        </p:txBody>
+      </p:sp>
+      <p:sp>
+        <p:nvSpPr>
+          <p:cNvPr id="6" name="Rectangle 5"/>
+          <p:cNvSpPr/>
+          <p:nvPr/>
+        </p:nvSpPr>
+        <p:spPr>
+          <a:xfrm>
+            <a:off x="502920" y="1051560"/>
+            <a:ext cx="11155680" cy="384048"/>
+          </a:xfrm>
+          <a:prstGeom prst="rect">
+            <a:avLst/>
+          </a:prstGeom>
+          <a:solidFill>
+            <a:srgbClr val="243C37"/>
+          </a:solidFill>
+          <a:ln>
+            <a:noFill/>
+          </a:ln>
+        </p:spPr>
+        <p:style>
+          <a:lnRef idx="1">
+            <a:schemeClr val="accent1"/>
+          </a:lnRef>
+          <a:fillRef idx="3">
+            <a:schemeClr val="accent1"/>
+          </a:fillRef>
+          <a:effectRef idx="2">
+            <a:schemeClr val="accent1"/>
+          </a:effectRef>
+          <a:fontRef idx="minor">
+            <a:schemeClr val="lt1"/>
+          </a:fontRef>
+        </p:style>
+        <p:txBody>
+          <a:bodyPr rtlCol="0" anchor="ctr"/>
+          <a:lstStyle/>
+          <a:p>
+            <a:pPr algn="ctr"/>
+          </a:p>
+        </p:txBody>
+      </p:sp>
+      <p:sp>
+        <p:nvSpPr>
+          <p:cNvPr id="7" name="Oval 6"/>
+          <p:cNvSpPr/>
+          <p:nvPr/>
+        </p:nvSpPr>
+        <p:spPr>
+          <a:xfrm>
+            <a:off x="667512" y="1170432"/>
+            <a:ext cx="146304" cy="146304"/>
+          </a:xfrm>
+          <a:prstGeom prst="ellipse">
+            <a:avLst/>
+          </a:prstGeom>
+          <a:solidFill>
+            <a:srgbClr val="C76B5A"/>
+          </a:solidFill>
+          <a:ln>
+            <a:noFill/>
+          </a:ln>
+        </p:spPr>
+        <p:style>
+          <a:lnRef idx="1">
+            <a:schemeClr val="accent1"/>
+          </a:lnRef>
+          <a:fillRef idx="3">
+            <a:schemeClr val="accent1"/>
+          </a:fillRef>
+          <a:effectRef idx="2">
+            <a:schemeClr val="accent1"/>
+          </a:effectRef>
+          <a:fontRef idx="minor">
+            <a:schemeClr val="lt1"/>
+          </a:fontRef>
+        </p:style>
+        <p:txBody>
+          <a:bodyPr rtlCol="0" anchor="ctr"/>
+          <a:lstStyle/>
+          <a:p>
+            <a:pPr algn="ctr"/>
+          </a:p>
+        </p:txBody>
+      </p:sp>
+      <p:sp>
+        <p:nvSpPr>
+          <p:cNvPr id="8" name="Oval 7"/>
+          <p:cNvSpPr/>
+          <p:nvPr/>
+        </p:nvSpPr>
+        <p:spPr>
+          <a:xfrm>
+            <a:off x="923544" y="1170432"/>
+            <a:ext cx="146304" cy="146304"/>
+          </a:xfrm>
+          <a:prstGeom prst="ellipse">
+            <a:avLst/>
+          </a:prstGeom>
+          <a:solidFill>
+            <a:srgbClr val="C9A05C"/>
+          </a:solidFill>
+          <a:ln>
+            <a:noFill/>
+          </a:ln>
+        </p:spPr>
+        <p:style>
+          <a:lnRef idx="1">
+            <a:schemeClr val="accent1"/>
+          </a:lnRef>
+          <a:fillRef idx="3">
+            <a:schemeClr val="accent1"/>
+          </a:fillRef>
+          <a:effectRef idx="2">
+            <a:schemeClr val="accent1"/>
+          </a:effectRef>
+          <a:fontRef idx="minor">
+            <a:schemeClr val="lt1"/>
+          </a:fontRef>
+        </p:style>
+        <p:txBody>
+          <a:bodyPr rtlCol="0" anchor="ctr"/>
+          <a:lstStyle/>
+          <a:p>
+            <a:pPr algn="ctr"/>
+          </a:p>
+        </p:txBody>
+      </p:sp>
+      <p:sp>
+        <p:nvSpPr>
+          <p:cNvPr id="9" name="Oval 8"/>
+          <p:cNvSpPr/>
+          <p:nvPr/>
+        </p:nvSpPr>
+        <p:spPr>
+          <a:xfrm>
+            <a:off x="1179576" y="1170432"/>
+            <a:ext cx="146304" cy="146304"/>
+          </a:xfrm>
+          <a:prstGeom prst="ellipse">
+            <a:avLst/>
+          </a:prstGeom>
+          <a:solidFill>
+            <a:srgbClr val="5E9A72"/>
+          </a:solidFill>
+          <a:ln>
+            <a:noFill/>
+          </a:ln>
+        </p:spPr>
+        <p:style>
+          <a:lnRef idx="1">
+            <a:schemeClr val="accent1"/>
+          </a:lnRef>
+          <a:fillRef idx="3">
+            <a:schemeClr val="accent1"/>
+          </a:fillRef>
+          <a:effectRef idx="2">
+            <a:schemeClr val="accent1"/>
+          </a:effectRef>
+          <a:fontRef idx="minor">
+            <a:schemeClr val="lt1"/>
+          </a:fontRef>
+        </p:style>
+        <p:txBody>
+          <a:bodyPr rtlCol="0" anchor="ctr"/>
+          <a:lstStyle/>
+          <a:p>
+            <a:pPr algn="ctr"/>
+          </a:p>
+        </p:txBody>
+      </p:sp>
+      <p:sp>
+        <p:nvSpPr>
+          <p:cNvPr id="10" name="Rounded Rectangle 9"/>
+          <p:cNvSpPr/>
+          <p:nvPr/>
+        </p:nvSpPr>
+        <p:spPr>
+          <a:xfrm>
+            <a:off x="1691640" y="1124712"/>
+            <a:ext cx="9692640" cy="237744"/>
+          </a:xfrm>
+          <a:prstGeom prst="roundRect">
+            <a:avLst>
+              <a:gd name="adj" fmla="val 50000"/>
+            </a:avLst>
+          </a:prstGeom>
+          <a:solidFill>
+            <a:srgbClr val="12221F"/>
+          </a:solidFill>
+          <a:ln>
+            <a:noFill/>
+          </a:ln>
+        </p:spPr>
+        <p:style>
+          <a:lnRef idx="1">
+            <a:schemeClr val="accent1"/>
+          </a:lnRef>
+          <a:fillRef idx="3">
+            <a:schemeClr val="accent1"/>
+          </a:fillRef>
+          <a:effectRef idx="2">
+            <a:schemeClr val="accent1"/>
+          </a:effectRef>
+          <a:fontRef idx="minor">
+            <a:schemeClr val="lt1"/>
+          </a:fontRef>
+        </p:style>
+        <p:txBody>
+          <a:bodyPr rtlCol="0" anchor="ctr"/>
+          <a:lstStyle/>
+          <a:p>
+            <a:pPr algn="ctr"/>
+          </a:p>
+        </p:txBody>
+      </p:sp>
+      <p:sp>
+        <p:nvSpPr>
+          <p:cNvPr id="11" name="TextBox 10"/>
+          <p:cNvSpPr txBox="1"/>
+          <p:nvPr/>
+        </p:nvSpPr>
+        <p:spPr>
+          <a:xfrm>
+            <a:off x="1828800" y="1124712"/>
+            <a:ext cx="9509760" cy="237744"/>
+          </a:xfrm>
+          <a:prstGeom prst="rect">
+            <a:avLst/>
+          </a:prstGeom>
+          <a:noFill/>
+        </p:spPr>
+        <p:txBody>
+          <a:bodyPr wrap="square">
+            <a:spAutoFit/>
+          </a:bodyPr>
+          <a:lstStyle/>
+          <a:p>
+            <a:pPr algn="l"/>
+            <a:r>
+              <a:rPr sz="1000" b="0">
+                <a:solidFill>
+                  <a:srgbClr val="A8B9B3"/>
+                </a:solidFill>
+                <a:latin typeface="Calibri"/>
+              </a:rPr>
+              <a:t>leshahker.github.io/bsaer-mockup/patients.html</a:t>
+            </a:r>
+          </a:p>
+        </p:txBody>
+      </p:sp>
       <p:pic>
         <p:nvPicPr>
-          <p:cNvPr id="5" name="Picture 4" descr="04-patients.png"/>
+          <p:cNvPr id="12" name="Picture 11" descr="04-patients.png"/>
           <p:cNvPicPr>
             <a:picLocks noChangeAspect="1"/>
           </p:cNvPicPr>
@@ -6708,8 +9059,8 @@
         </p:blipFill>
         <p:spPr>
           <a:xfrm>
-            <a:off x="731520" y="1097280"/>
-            <a:ext cx="8046720" cy="5029200"/>
+            <a:off x="2503627" y="1545336"/>
+            <a:ext cx="7154265" cy="4471416"/>
           </a:xfrm>
           <a:prstGeom prst="rect">
             <a:avLst/>
@@ -6718,7 +9069,50 @@
       </p:pic>
       <p:sp>
         <p:nvSpPr>
-          <p:cNvPr id="6" name="TextBox 5"/>
+          <p:cNvPr id="13" name="Rectangle 12"/>
+          <p:cNvSpPr/>
+          <p:nvPr/>
+        </p:nvSpPr>
+        <p:spPr>
+          <a:xfrm>
+            <a:off x="2503627" y="1545336"/>
+            <a:ext cx="7154265" cy="4471416"/>
+          </a:xfrm>
+          <a:prstGeom prst="rect">
+            <a:avLst/>
+          </a:prstGeom>
+          <a:noFill/>
+          <a:ln w="15875">
+            <a:solidFill>
+              <a:srgbClr val="3A554E"/>
+            </a:solidFill>
+          </a:ln>
+        </p:spPr>
+        <p:style>
+          <a:lnRef idx="1">
+            <a:schemeClr val="accent1"/>
+          </a:lnRef>
+          <a:fillRef idx="3">
+            <a:schemeClr val="accent1"/>
+          </a:fillRef>
+          <a:effectRef idx="2">
+            <a:schemeClr val="accent1"/>
+          </a:effectRef>
+          <a:fontRef idx="minor">
+            <a:schemeClr val="lt1"/>
+          </a:fontRef>
+        </p:style>
+        <p:txBody>
+          <a:bodyPr rtlCol="0" anchor="ctr"/>
+          <a:lstStyle/>
+          <a:p>
+            <a:pPr algn="ctr"/>
+          </a:p>
+        </p:txBody>
+      </p:sp>
+      <p:sp>
+        <p:nvSpPr>
+          <p:cNvPr id="14" name="TextBox 13"/>
           <p:cNvSpPr txBox="1"/>
           <p:nvPr/>
         </p:nvSpPr>
@@ -6742,7 +9136,7 @@
             <a:r>
               <a:rPr sz="1100" b="0">
                 <a:solidFill>
-                  <a:srgbClr val="66756E"/>
+                  <a:srgbClr val="8AA199"/>
                 </a:solidFill>
                 <a:latin typeface="Calibri"/>
               </a:rPr>
@@ -6753,7 +9147,7 @@
       </p:sp>
       <p:sp>
         <p:nvSpPr>
-          <p:cNvPr id="7" name="TextBox 6"/>
+          <p:cNvPr id="15" name="TextBox 14"/>
           <p:cNvSpPr txBox="1"/>
           <p:nvPr/>
         </p:nvSpPr>
@@ -6777,7 +9171,7 @@
             <a:r>
               <a:rPr sz="1100" b="0">
                 <a:solidFill>
-                  <a:srgbClr val="66756E"/>
+                  <a:srgbClr val="8AA199"/>
                 </a:solidFill>
                 <a:latin typeface="Calibri"/>
               </a:rPr>
